--- a/Topic_B/Exam_Practice/TB-L04_Speaking_Workshop_My_Home_Rooms_and_Garden.pptx
+++ b/Topic_B/Exam_Practice/TB-L04_Speaking_Workshop_My_Home_Rooms_and_Garden.pptx
@@ -615,7 +615,11 @@
           <a:lstStyle/>
           <a:p>
             <a:r>
-              <a:rPr lang="en-US" dirty="0"/>
+              <a:rPr lang="ar-SA" dirty="0">
+                <a:latin typeface="Amiri" pitchFamily="2" charset="-78"/>
+                <a:ea typeface="Amiri" pitchFamily="2" charset="-78"/>
+                <a:cs typeface="Amiri" pitchFamily="2" charset="-78"/>
+              </a:rPr>
               <a:t>ROLE PLAY C (Develop) — a room swap.
 SET-UP IN THE BREAKOUT ROOM: A = examiner (reads the left column ONLY — the questions, in order), B = candidate (sees the task column; Core may use the help column), C = observer (ticks the feedback checklist). 1 minute preparation, about 3 minutes speaking, 1 minute feedback, then rotate.
 Task ! is the unexpected question: in the exam the candidate has not seen it — the examiner should read it without warning.
@@ -707,7 +711,11 @@
           <a:lstStyle/>
           <a:p>
             <a:r>
-              <a:rPr lang="en-US" dirty="0"/>
+              <a:rPr lang="ar-SA" dirty="0">
+                <a:latin typeface="Amiri" pitchFamily="2" charset="-78"/>
+                <a:ea typeface="Amiri" pitchFamily="2" charset="-78"/>
+                <a:cs typeface="Amiri" pitchFamily="2" charset="-78"/>
+              </a:rPr>
               <a:t>ROLE PLAY D (Stretch) — a housing survey.
 SET-UP IN THE BREAKOUT ROOM: A = examiner (reads the left column ONLY — the questions, in order), B = candidate (sees the task column; Core may use the help column), C = observer (ticks the feedback checklist). 1 minute preparation, about 3 minutes speaking, 1 minute feedback, then rotate.
 Task ! is the unexpected question: in the exam the candidate has not seen it — the examiner should read it without warning.
@@ -1243,7 +1251,11 @@
           <a:lstStyle/>
           <a:p>
             <a:r>
-              <a:rPr lang="en-US" dirty="0"/>
+              <a:rPr lang="ar-SA" dirty="0">
+                <a:latin typeface="Amiri" pitchFamily="2" charset="-78"/>
+                <a:ea typeface="Amiri" pitchFamily="2" charset="-78"/>
+                <a:cs typeface="Amiri" pitchFamily="2" charset="-78"/>
+              </a:rPr>
               <a:t>TOPIC CONVERSATION — Core. Examiner asks the questions in order and may add “لِمَاذَا؟ / هَلْ يُمْكِنُ أَنْ تَشْرَحَ أَكْثَرَ؟” to push for more. Candidate aims for one full sentence per question.
 </a:t>
             </a:r>
@@ -1332,7 +1344,11 @@
           <a:lstStyle/>
           <a:p>
             <a:r>
-              <a:rPr lang="en-US" dirty="0"/>
+              <a:rPr lang="ar-SA" dirty="0">
+                <a:latin typeface="Amiri" pitchFamily="2" charset="-78"/>
+                <a:ea typeface="Amiri" pitchFamily="2" charset="-78"/>
+                <a:cs typeface="Amiri" pitchFamily="2" charset="-78"/>
+              </a:rPr>
               <a:t>TOPIC CONVERSATION — Develop. Examiner asks the questions in order and may add “لِمَاذَا؟ / هَلْ يُمْكِنُ أَنْ تَشْرَحَ أَكْثَرَ؟” to push for more. Candidate aims for two or three sentences, with locations and a reason.
 </a:t>
             </a:r>
@@ -1421,7 +1437,11 @@
           <a:lstStyle/>
           <a:p>
             <a:r>
-              <a:rPr lang="en-US" dirty="0"/>
+              <a:rPr lang="ar-SA" dirty="0">
+                <a:latin typeface="Amiri" pitchFamily="2" charset="-78"/>
+                <a:ea typeface="Amiri" pitchFamily="2" charset="-78"/>
+                <a:cs typeface="Amiri" pitchFamily="2" charset="-78"/>
+              </a:rPr>
               <a:t>TOPIC CONVERSATION — Stretch. Examiner asks the questions in order and may add “لِمَاذَا؟ / هَلْ يُمْكِنُ أَنْ تَشْرَحَ أَكْثَرَ؟” to push for more. Candidate aims for a developed answer: opinion, comparison, concession and a conditional.
 </a:t>
             </a:r>
@@ -1510,7 +1530,11 @@
           <a:lstStyle/>
           <a:p>
             <a:r>
-              <a:rPr lang="en-US" dirty="0"/>
+              <a:rPr lang="ar-SA" dirty="0">
+                <a:latin typeface="Amiri" pitchFamily="2" charset="-78"/>
+                <a:ea typeface="Amiri" pitchFamily="2" charset="-78"/>
+                <a:cs typeface="Amiri" pitchFamily="2" charset="-78"/>
+              </a:rPr>
               <a:t>WELCOME (1 min) — while students join.
 • Greet each student by name as they arrive: السَّلَامُ عَلَيْكُمْ. Take the register (Pastoral Tracker: attendance 0/1).
 • 2-MINUTE CHECK-IN (SEND training): a private chat to any student who seemed unsettled last lesson — “Are you okay today? 👍 / 👎”.
@@ -2224,7 +2248,11 @@
           <a:lstStyle/>
           <a:p>
             <a:r>
-              <a:rPr lang="en-US" dirty="0"/>
+              <a:rPr lang="ar-SA" dirty="0">
+                <a:latin typeface="Amiri" pitchFamily="2" charset="-78"/>
+                <a:ea typeface="Amiri" pitchFamily="2" charset="-78"/>
+                <a:cs typeface="Amiri" pitchFamily="2" charset="-78"/>
+              </a:rPr>
               <a:t>TEACH (3 min). Role play = precise and complete; conversation = develop. Choral repetition of the repair phrases. To a girl: تُعِيدِي.</a:t>
             </a:r>
             <a:endParaRPr lang="en-US" dirty="0"/>
@@ -2312,7 +2340,11 @@
           <a:lstStyle/>
           <a:p>
             <a:r>
-              <a:rPr lang="en-US" dirty="0"/>
+              <a:rPr lang="ar-SA" dirty="0">
+                <a:latin typeface="Amiri" pitchFamily="2" charset="-78"/>
+                <a:ea typeface="Amiri" pitchFamily="2" charset="-78"/>
+                <a:cs typeface="Amiri" pitchFamily="2" charset="-78"/>
+              </a:rPr>
               <a:t>LANGUAGE BANK (2 min) — يُوجَدُ for masculine nouns, تُوجَدُ for feminine: يُوجَدُ فِي بَيْتِنَا مَطْبَخٌ كَبِيرٌ · تُوجَدُ حَدِيقَةٌ صَغِيرَةٌ. Floors use ordinals: فِي الطَّابِقِ الثَّانِي.</a:t>
             </a:r>
             <a:endParaRPr lang="en-US" dirty="0"/>
@@ -2400,7 +2432,11 @@
           <a:lstStyle/>
           <a:p>
             <a:r>
-              <a:rPr lang="en-US" dirty="0"/>
+              <a:rPr lang="ar-SA" dirty="0">
+                <a:latin typeface="Amiri" pitchFamily="2" charset="-78"/>
+                <a:ea typeface="Amiri" pitchFamily="2" charset="-78"/>
+                <a:cs typeface="Amiri" pitchFamily="2" charset="-78"/>
+              </a:rPr>
               <a:t>LANGUAGE BANK (2 min) — prepositions take the genitive: بِجَانِبِ المَطْبَخِ · أَمَامَ البَيْتِ. Non-human plurals take the feminine singular: الغُرَفُ وَاسِعَةٌ وَمُرِيحَةٌ.</a:t>
             </a:r>
             <a:endParaRPr lang="en-US" dirty="0"/>
@@ -2576,7 +2612,11 @@
           <a:lstStyle/>
           <a:p>
             <a:r>
-              <a:rPr lang="en-US" dirty="0"/>
+              <a:rPr lang="ar-SA" dirty="0">
+                <a:latin typeface="Amiri" pitchFamily="2" charset="-78"/>
+                <a:ea typeface="Amiri" pitchFamily="2" charset="-78"/>
+                <a:cs typeface="Amiri" pitchFamily="2" charset="-78"/>
+              </a:rPr>
               <a:t>ROLE PLAY A (Core) — a new home.
 SET-UP IN THE BREAKOUT ROOM: A = examiner (reads the left column ONLY — the questions, in order), B = candidate (sees the task column; Core may use the help column), C = observer (ticks the feedback checklist). 1 minute preparation, about 3 minutes speaking, 1 minute feedback, then rotate.
 Task ! is the unexpected question: in the exam the candidate has not seen it — the examiner should read it without warning.
@@ -2668,7 +2708,11 @@
           <a:lstStyle/>
           <a:p>
             <a:r>
-              <a:rPr lang="en-US" dirty="0"/>
+              <a:rPr lang="ar-SA" dirty="0">
+                <a:latin typeface="Amiri" pitchFamily="2" charset="-78"/>
+                <a:ea typeface="Amiri" pitchFamily="2" charset="-78"/>
+                <a:cs typeface="Amiri" pitchFamily="2" charset="-78"/>
+              </a:rPr>
               <a:t>ROLE PLAY B (Core+) — an estate agent.
 SET-UP IN THE BREAKOUT ROOM: A = examiner (reads the left column ONLY — the questions, in order), B = candidate (sees the task column; Core may use the help column), C = observer (ticks the feedback checklist). 1 minute preparation, about 3 minutes speaking, 1 minute feedback, then rotate.
 Task ! is the unexpected question: in the exam the candidate has not seen it — the examiner should read it without warning.
@@ -3156,6 +3200,7 @@
                   <a:srgbClr val="D4AF37"/>
                 </a:solidFill>
                 <a:latin typeface="Amiri" pitchFamily="2" charset="-78"/>
+                <a:ea typeface="Amiri" pitchFamily="2" charset="-78"/>
                 <a:cs typeface="Amiri" pitchFamily="2" charset="-78"/>
               </a:rPr>
               <a:t>م</a:t>
@@ -3362,6 +3407,7 @@
                   <a:srgbClr val="D4AF37"/>
                 </a:solidFill>
                 <a:latin typeface="Amiri" pitchFamily="2" charset="-78"/>
+                <a:ea typeface="Amiri" pitchFamily="2" charset="-78"/>
                 <a:cs typeface="Amiri" pitchFamily="2" charset="-78"/>
               </a:rPr>
               <a:t>وَرْشَةُ التَّحَدُّثِ — بَيْتِي</a:t>
@@ -3819,6 +3865,7 @@
                   <a:srgbClr val="D4AF37"/>
                 </a:solidFill>
                 <a:latin typeface="Amiri" pitchFamily="2" charset="-78"/>
+                <a:ea typeface="Amiri" pitchFamily="2" charset="-78"/>
                 <a:cs typeface="Amiri" pitchFamily="2" charset="-78"/>
               </a:rPr>
               <a:t>م</a:t>
@@ -4139,6 +4186,7 @@
                   <a:srgbClr val="8A6D1E"/>
                 </a:solidFill>
                 <a:latin typeface="Amiri" pitchFamily="2" charset="-78"/>
+                <a:ea typeface="Amiri" pitchFamily="2" charset="-78"/>
                 <a:cs typeface="Amiri" pitchFamily="2" charset="-78"/>
               </a:rPr>
               <a:t>أَتَقَاسَمُ الغُرْفَةَ</a:t>
@@ -4419,6 +4467,7 @@
                   <a:srgbClr val="1B3B6F"/>
                 </a:solidFill>
                 <a:latin typeface="Amiri" pitchFamily="2" charset="-78"/>
+                <a:ea typeface="Amiri" pitchFamily="2" charset="-78"/>
                 <a:cs typeface="Amiri" pitchFamily="2" charset="-78"/>
               </a:rPr>
               <a:t>أَفْهَمُ، لٰكِنَّ غُرْفَتِي …</a:t>
@@ -4495,6 +4544,7 @@
                   <a:srgbClr val="1B3B6F"/>
                 </a:solidFill>
                 <a:latin typeface="Amiri" pitchFamily="2" charset="-78"/>
+                <a:ea typeface="Amiri" pitchFamily="2" charset="-78"/>
                 <a:cs typeface="Amiri" pitchFamily="2" charset="-78"/>
               </a:rPr>
               <a:t>جَدَّتُكَ سَتَسْكُنُ مَعَنَا، فَسَتَتَقَاسَمُ غُرْفَتَكَ مَعَ أَخِيكَ.</a:t>
@@ -4598,6 +4648,7 @@
                   <a:srgbClr val="1B3B6F"/>
                 </a:solidFill>
                 <a:latin typeface="Amiri" pitchFamily="2" charset="-78"/>
+                <a:ea typeface="Amiri" pitchFamily="2" charset="-78"/>
                 <a:cs typeface="Amiri" pitchFamily="2" charset="-78"/>
               </a:rPr>
               <a:t>مَا رَأْيُكَ أَنْ …؟</a:t>
@@ -4674,6 +4725,7 @@
                   <a:srgbClr val="1B3B6F"/>
                 </a:solidFill>
                 <a:latin typeface="Amiri" pitchFamily="2" charset="-78"/>
+                <a:ea typeface="Amiri" pitchFamily="2" charset="-78"/>
                 <a:cs typeface="Amiri" pitchFamily="2" charset="-78"/>
               </a:rPr>
               <a:t>مَا اقْتِرَاحُكَ؟</a:t>
@@ -4777,6 +4829,7 @@
                   <a:srgbClr val="1B3B6F"/>
                 </a:solidFill>
                 <a:latin typeface="Amiri" pitchFamily="2" charset="-78"/>
+                <a:ea typeface="Amiri" pitchFamily="2" charset="-78"/>
                 <a:cs typeface="Amiri" pitchFamily="2" charset="-78"/>
               </a:rPr>
               <a:t>سَأَدْرُسُ فِي … لِأَنَّهَا …</a:t>
@@ -4853,6 +4906,7 @@
                   <a:srgbClr val="1B3B6F"/>
                 </a:solidFill>
                 <a:latin typeface="Amiri" pitchFamily="2" charset="-78"/>
+                <a:ea typeface="Amiri" pitchFamily="2" charset="-78"/>
                 <a:cs typeface="Amiri" pitchFamily="2" charset="-78"/>
               </a:rPr>
               <a:t>فِكْرَةٌ جَيِّدَةٌ. وَأَيْنَ تَدْرُسُ إِذَنْ؟</a:t>
@@ -4956,6 +5010,7 @@
                   <a:srgbClr val="1B3B6F"/>
                 </a:solidFill>
                 <a:latin typeface="Amiri" pitchFamily="2" charset="-78"/>
+                <a:ea typeface="Amiri" pitchFamily="2" charset="-78"/>
                 <a:cs typeface="Amiri" pitchFamily="2" charset="-78"/>
               </a:rPr>
               <a:t>هَلْ يُمْكِنُ أَنْ …؟</a:t>
@@ -5032,6 +5087,7 @@
                   <a:srgbClr val="1B3B6F"/>
                 </a:solidFill>
                 <a:latin typeface="Amiri" pitchFamily="2" charset="-78"/>
+                <a:ea typeface="Amiri" pitchFamily="2" charset="-78"/>
                 <a:cs typeface="Amiri" pitchFamily="2" charset="-78"/>
               </a:rPr>
               <a:t>… أَخُوكَ يَتْرُكُ أَغْرَاضَهُ فِي كُلِّ مَكَانٍ!</a:t>
@@ -5135,6 +5191,7 @@
                   <a:srgbClr val="1B3B6F"/>
                 </a:solidFill>
                 <a:latin typeface="Amiri" pitchFamily="2" charset="-78"/>
+                <a:ea typeface="Amiri" pitchFamily="2" charset="-78"/>
                 <a:cs typeface="Amiri" pitchFamily="2" charset="-78"/>
               </a:rPr>
               <a:t>كَانَتْ … وَكَانَ فِيهَا …</a:t>
@@ -5211,6 +5268,7 @@
                   <a:srgbClr val="1B3B6F"/>
                 </a:solidFill>
                 <a:latin typeface="Amiri" pitchFamily="2" charset="-78"/>
+                <a:ea typeface="Amiri" pitchFamily="2" charset="-78"/>
                 <a:cs typeface="Amiri" pitchFamily="2" charset="-78"/>
               </a:rPr>
               <a:t>كَيْفَ كَانَتْ غُرْفَتُكَ عِنْدَمَا كُنْتَ صَغِيرًا؟</a:t>
@@ -5420,6 +5478,7 @@
                   <a:srgbClr val="D4AF37"/>
                 </a:solidFill>
                 <a:latin typeface="Amiri" pitchFamily="2" charset="-78"/>
+                <a:ea typeface="Amiri" pitchFamily="2" charset="-78"/>
                 <a:cs typeface="Amiri" pitchFamily="2" charset="-78"/>
               </a:rPr>
               <a:t>م</a:t>
@@ -5740,6 +5799,7 @@
                   <a:srgbClr val="8A6D1E"/>
                 </a:solidFill>
                 <a:latin typeface="Amiri" pitchFamily="2" charset="-78"/>
+                <a:ea typeface="Amiri" pitchFamily="2" charset="-78"/>
                 <a:cs typeface="Amiri" pitchFamily="2" charset="-78"/>
               </a:rPr>
               <a:t>شَقَّةٌ فِي المَدِينَةِ أَمْ بَيْتٌ فِي الرِّيفِ؟</a:t>
@@ -6020,6 +6080,7 @@
                   <a:srgbClr val="1B3B6F"/>
                 </a:solidFill>
                 <a:latin typeface="Amiri" pitchFamily="2" charset="-78"/>
+                <a:ea typeface="Amiri" pitchFamily="2" charset="-78"/>
                 <a:cs typeface="Amiri" pitchFamily="2" charset="-78"/>
               </a:rPr>
               <a:t>أُفَضِّلُ … لِأَنَّ … وَلِأَنَّ …</a:t>
@@ -6096,6 +6157,7 @@
                   <a:srgbClr val="1B3B6F"/>
                 </a:solidFill>
                 <a:latin typeface="Amiri" pitchFamily="2" charset="-78"/>
+                <a:ea typeface="Amiri" pitchFamily="2" charset="-78"/>
                 <a:cs typeface="Amiri" pitchFamily="2" charset="-78"/>
               </a:rPr>
               <a:t>أَيْنَ تُفَضِّلُ أَنْ تَسْكُنَ: فِي المَدِينَةِ أَمْ فِي الرِّيفِ؟</a:t>
@@ -6199,6 +6261,7 @@
                   <a:srgbClr val="1B3B6F"/>
                 </a:solidFill>
                 <a:latin typeface="Amiri" pitchFamily="2" charset="-78"/>
+                <a:ea typeface="Amiri" pitchFamily="2" charset="-78"/>
                 <a:cs typeface="Amiri" pitchFamily="2" charset="-78"/>
               </a:rPr>
               <a:t>المُشْكِلَةُ أَنَّ … مَثَلًا …</a:t>
@@ -6275,6 +6338,7 @@
                   <a:srgbClr val="1B3B6F"/>
                 </a:solidFill>
                 <a:latin typeface="Amiri" pitchFamily="2" charset="-78"/>
+                <a:ea typeface="Amiri" pitchFamily="2" charset="-78"/>
                 <a:cs typeface="Amiri" pitchFamily="2" charset="-78"/>
               </a:rPr>
               <a:t>وَمَا عُيُوبُ السَّكَنِ فِي المَدِينَةِ؟</a:t>
@@ -6378,6 +6442,7 @@
                   <a:srgbClr val="1B3B6F"/>
                 </a:solidFill>
                 <a:latin typeface="Amiri" pitchFamily="2" charset="-78"/>
+                <a:ea typeface="Amiri" pitchFamily="2" charset="-78"/>
                 <a:cs typeface="Amiri" pitchFamily="2" charset="-78"/>
               </a:rPr>
               <a:t>كَانَتِ البُيُوتُ … أَمَّا اليَوْمَ فَنَسْكُنُ …</a:t>
@@ -6454,6 +6519,7 @@
                   <a:srgbClr val="1B3B6F"/>
                 </a:solidFill>
                 <a:latin typeface="Amiri" pitchFamily="2" charset="-78"/>
+                <a:ea typeface="Amiri" pitchFamily="2" charset="-78"/>
                 <a:cs typeface="Amiri" pitchFamily="2" charset="-78"/>
               </a:rPr>
               <a:t>كَيْفَ كَانَتِ البُيُوتُ فِي أَيَّامِ أَجْدَادِكَ؟</a:t>
@@ -6557,6 +6623,7 @@
                   <a:srgbClr val="1B3B6F"/>
                 </a:solidFill>
                 <a:latin typeface="Amiri" pitchFamily="2" charset="-78"/>
+                <a:ea typeface="Amiri" pitchFamily="2" charset="-78"/>
                 <a:cs typeface="Amiri" pitchFamily="2" charset="-78"/>
               </a:rPr>
               <a:t>صَحِيحٌ أَنَّ … غَيْرَ أَنَّ …</a:t>
@@ -6633,6 +6700,7 @@
                   <a:srgbClr val="1B3B6F"/>
                 </a:solidFill>
                 <a:latin typeface="Amiri" pitchFamily="2" charset="-78"/>
+                <a:ea typeface="Amiri" pitchFamily="2" charset="-78"/>
                 <a:cs typeface="Amiri" pitchFamily="2" charset="-78"/>
               </a:rPr>
               <a:t>هَلِ الحَدَائِقُ ضَرُورِيَّةٌ لِلْأَطْفَالِ؟</a:t>
@@ -6736,6 +6804,7 @@
                   <a:srgbClr val="1B3B6F"/>
                 </a:solidFill>
                 <a:latin typeface="Amiri" pitchFamily="2" charset="-78"/>
+                <a:ea typeface="Amiri" pitchFamily="2" charset="-78"/>
                 <a:cs typeface="Amiri" pitchFamily="2" charset="-78"/>
               </a:rPr>
               <a:t>لَوْ صَمَّمْتُ …، لَجَعَلْتُ …</a:t>
@@ -6812,6 +6881,7 @@
                   <a:srgbClr val="1B3B6F"/>
                 </a:solidFill>
                 <a:latin typeface="Amiri" pitchFamily="2" charset="-78"/>
+                <a:ea typeface="Amiri" pitchFamily="2" charset="-78"/>
                 <a:cs typeface="Amiri" pitchFamily="2" charset="-78"/>
               </a:rPr>
               <a:t>لَوْ صَمَّمْتَ بَيْتَ أَحْلَامِكَ، كَيْفَ يَكُونُ؟</a:t>
@@ -7021,6 +7091,7 @@
                   <a:srgbClr val="D4AF37"/>
                 </a:solidFill>
                 <a:latin typeface="Amiri" pitchFamily="2" charset="-78"/>
+                <a:ea typeface="Amiri" pitchFamily="2" charset="-78"/>
                 <a:cs typeface="Amiri" pitchFamily="2" charset="-78"/>
               </a:rPr>
               <a:t>م</a:t>
@@ -7341,6 +7412,7 @@
                   <a:srgbClr val="8A6D1E"/>
                 </a:solidFill>
                 <a:latin typeface="Amiri" pitchFamily="2" charset="-78"/>
+                <a:ea typeface="Amiri" pitchFamily="2" charset="-78"/>
                 <a:cs typeface="Amiri" pitchFamily="2" charset="-78"/>
               </a:rPr>
               <a:t>وَرَقَةُ المُلَاحِظِ</a:t>
@@ -8811,6 +8883,7 @@
                   <a:srgbClr val="D4AF37"/>
                 </a:solidFill>
                 <a:latin typeface="Amiri" pitchFamily="2" charset="-78"/>
+                <a:ea typeface="Amiri" pitchFamily="2" charset="-78"/>
                 <a:cs typeface="Amiri" pitchFamily="2" charset="-78"/>
               </a:rPr>
               <a:t>م</a:t>
@@ -9131,6 +9204,7 @@
                   <a:srgbClr val="8A6D1E"/>
                 </a:solidFill>
                 <a:latin typeface="Amiri" pitchFamily="2" charset="-78"/>
+                <a:ea typeface="Amiri" pitchFamily="2" charset="-78"/>
                 <a:cs typeface="Amiri" pitchFamily="2" charset="-78"/>
               </a:rPr>
               <a:t>نَمُوذَجُ الإِجَابَةِ</a:t>
@@ -9373,6 +9447,7 @@
                   <a:srgbClr val="1B3B6F"/>
                 </a:solidFill>
                 <a:latin typeface="Amiri" pitchFamily="2" charset="-78"/>
+                <a:ea typeface="Amiri" pitchFamily="2" charset="-78"/>
                 <a:cs typeface="Amiri" pitchFamily="2" charset="-78"/>
               </a:rPr>
               <a:t>فِيهَا خَمْسُ غُرَفٍ: ثَلَاثُ غُرَفِ نَوْمٍ، وَغُرْفَةُ جُلُوسٍ، وَمَطْبَخٌ.</a:t>
@@ -9449,6 +9524,7 @@
                   <a:srgbClr val="1B3B6F"/>
                 </a:solidFill>
                 <a:latin typeface="Amiri" pitchFamily="2" charset="-78"/>
+                <a:ea typeface="Amiri" pitchFamily="2" charset="-78"/>
                 <a:cs typeface="Amiri" pitchFamily="2" charset="-78"/>
               </a:rPr>
               <a:t>شَقَّةٌ جَمِيلَةٌ! كَمْ غُرْفَةً فِيهَا؟</a:t>
@@ -9552,6 +9628,7 @@
                   <a:srgbClr val="1B3B6F"/>
                 </a:solidFill>
                 <a:latin typeface="Amiri" pitchFamily="2" charset="-78"/>
+                <a:ea typeface="Amiri" pitchFamily="2" charset="-78"/>
                 <a:cs typeface="Amiri" pitchFamily="2" charset="-78"/>
               </a:rPr>
               <a:t>نَحْنُ فِي الطَّابِقِ الرَّابِعِ، وَيُوجَدُ مِصْعَدٌ.</a:t>
@@ -9628,6 +9705,7 @@
                   <a:srgbClr val="1B3B6F"/>
                 </a:solidFill>
                 <a:latin typeface="Amiri" pitchFamily="2" charset="-78"/>
+                <a:ea typeface="Amiri" pitchFamily="2" charset="-78"/>
                 <a:cs typeface="Amiri" pitchFamily="2" charset="-78"/>
               </a:rPr>
               <a:t>فِي أَيِّ طَابِقٍ أَنْتُمْ؟</a:t>
@@ -9731,6 +9809,7 @@
                   <a:srgbClr val="1B3B6F"/>
                 </a:solidFill>
                 <a:latin typeface="Amiri" pitchFamily="2" charset="-78"/>
+                <a:ea typeface="Amiri" pitchFamily="2" charset="-78"/>
                 <a:cs typeface="Amiri" pitchFamily="2" charset="-78"/>
               </a:rPr>
               <a:t>غُرْفَتِي بِجَانِبِ الحَمَّامِ، أَمَامَ غُرْفَةِ أُخْتِي.</a:t>
@@ -9807,6 +9886,7 @@
                   <a:srgbClr val="1B3B6F"/>
                 </a:solidFill>
                 <a:latin typeface="Amiri" pitchFamily="2" charset="-78"/>
+                <a:ea typeface="Amiri" pitchFamily="2" charset="-78"/>
                 <a:cs typeface="Amiri" pitchFamily="2" charset="-78"/>
               </a:rPr>
               <a:t>أَيْنَ غُرْفَتُكَ؟</a:t>
@@ -9910,6 +9990,7 @@
                   <a:srgbClr val="1B3B6F"/>
                 </a:solidFill>
                 <a:latin typeface="Amiri" pitchFamily="2" charset="-78"/>
+                <a:ea typeface="Amiri" pitchFamily="2" charset="-78"/>
                 <a:cs typeface="Amiri" pitchFamily="2" charset="-78"/>
               </a:rPr>
               <a:t>يُوجَدُ سَرِيرٌ وَمَكْتَبٌ، وَتُوجَدُ خِزَانَةٌ كَبِيرَةٌ.</a:t>
@@ -9986,6 +10067,7 @@
                   <a:srgbClr val="1B3B6F"/>
                 </a:solidFill>
                 <a:latin typeface="Amiri" pitchFamily="2" charset="-78"/>
+                <a:ea typeface="Amiri" pitchFamily="2" charset="-78"/>
                 <a:cs typeface="Amiri" pitchFamily="2" charset="-78"/>
               </a:rPr>
               <a:t>مَاذَا يُوجَدُ فِي غُرْفَتِكَ؟</a:t>
@@ -10089,6 +10171,7 @@
                   <a:srgbClr val="1B3B6F"/>
                 </a:solidFill>
                 <a:latin typeface="Amiri" pitchFamily="2" charset="-78"/>
+                <a:ea typeface="Amiri" pitchFamily="2" charset="-78"/>
                 <a:cs typeface="Amiri" pitchFamily="2" charset="-78"/>
               </a:rPr>
               <a:t>نَعَمْ، لِأَنَّهَا وَاسِعَةٌ وَمُرِيحَةٌ، لٰكِنْ لَيْسَتْ فِيهَا حَدِيقَةٌ.</a:t>
@@ -10165,6 +10248,7 @@
                   <a:srgbClr val="1B3B6F"/>
                 </a:solidFill>
                 <a:latin typeface="Amiri" pitchFamily="2" charset="-78"/>
+                <a:ea typeface="Amiri" pitchFamily="2" charset="-78"/>
                 <a:cs typeface="Amiri" pitchFamily="2" charset="-78"/>
               </a:rPr>
               <a:t>هَلْ تُحِبُّ هٰذِهِ الشَّقَّةَ؟</a:t>
@@ -10374,6 +10458,7 @@
                   <a:srgbClr val="D4AF37"/>
                 </a:solidFill>
                 <a:latin typeface="Amiri" pitchFamily="2" charset="-78"/>
+                <a:ea typeface="Amiri" pitchFamily="2" charset="-78"/>
                 <a:cs typeface="Amiri" pitchFamily="2" charset="-78"/>
               </a:rPr>
               <a:t>م</a:t>
@@ -10694,6 +10779,7 @@
                   <a:srgbClr val="8A6D1E"/>
                 </a:solidFill>
                 <a:latin typeface="Amiri" pitchFamily="2" charset="-78"/>
+                <a:ea typeface="Amiri" pitchFamily="2" charset="-78"/>
                 <a:cs typeface="Amiri" pitchFamily="2" charset="-78"/>
               </a:rPr>
               <a:t>نَمُوذَجُ الإِجَابَةِ</a:t>
@@ -10936,6 +11022,7 @@
                   <a:srgbClr val="1B3B6F"/>
                 </a:solidFill>
                 <a:latin typeface="Amiri" pitchFamily="2" charset="-78"/>
+                <a:ea typeface="Amiri" pitchFamily="2" charset="-78"/>
                 <a:cs typeface="Amiri" pitchFamily="2" charset="-78"/>
               </a:rPr>
               <a:t>أَبْحَثُ عَنْ بَيْتٍ فِيهِ ثَلَاثُ غُرَفِ نَوْمٍ وَحَدِيقَةٌ.</a:t>
@@ -11012,6 +11099,7 @@
                   <a:srgbClr val="1B3B6F"/>
                 </a:solidFill>
                 <a:latin typeface="Amiri" pitchFamily="2" charset="-78"/>
+                <a:ea typeface="Amiri" pitchFamily="2" charset="-78"/>
                 <a:cs typeface="Amiri" pitchFamily="2" charset="-78"/>
               </a:rPr>
               <a:t>أَهْلًا، مَاذَا تَبْحَثُ عَنْهُ؟</a:t>
@@ -11115,6 +11203,7 @@
                   <a:srgbClr val="1B3B6F"/>
                 </a:solidFill>
                 <a:latin typeface="Amiri" pitchFamily="2" charset="-78"/>
+                <a:ea typeface="Amiri" pitchFamily="2" charset="-78"/>
                 <a:cs typeface="Amiri" pitchFamily="2" charset="-78"/>
               </a:rPr>
               <a:t>قَرِيبٌ مِنَ المَدْرَسَةِ، لِأَنَّ أَوْلَادِي صِغَارٌ.</a:t>
@@ -11191,6 +11280,7 @@
                   <a:srgbClr val="1B3B6F"/>
                 </a:solidFill>
                 <a:latin typeface="Amiri" pitchFamily="2" charset="-78"/>
+                <a:ea typeface="Amiri" pitchFamily="2" charset="-78"/>
                 <a:cs typeface="Amiri" pitchFamily="2" charset="-78"/>
               </a:rPr>
               <a:t>فِي أَيِّ مِنْطَقَةٍ؟</a:t>
@@ -11294,6 +11384,7 @@
                   <a:srgbClr val="1B3B6F"/>
                 </a:solidFill>
                 <a:latin typeface="Amiri" pitchFamily="2" charset="-78"/>
+                <a:ea typeface="Amiri" pitchFamily="2" charset="-78"/>
                 <a:cs typeface="Amiri" pitchFamily="2" charset="-78"/>
               </a:rPr>
               <a:t>هَلْ يُوجَدُ مَوْقِفٌ لِلسَّيَّارَةِ؟ وَكَمِ الإِيجَارُ فِي الشَّهْرِ؟</a:t>
@@ -11370,6 +11461,7 @@
                   <a:srgbClr val="1B3B6F"/>
                 </a:solidFill>
                 <a:latin typeface="Amiri" pitchFamily="2" charset="-78"/>
+                <a:ea typeface="Amiri" pitchFamily="2" charset="-78"/>
                 <a:cs typeface="Amiri" pitchFamily="2" charset="-78"/>
               </a:rPr>
               <a:t>عِنْدَنَا هٰذَا البَيْتُ فِي شَارِعِ الوَرْدِ.</a:t>
@@ -11473,6 +11565,7 @@
                   <a:srgbClr val="1B3B6F"/>
                 </a:solidFill>
                 <a:latin typeface="Amiri" pitchFamily="2" charset="-78"/>
+                <a:ea typeface="Amiri" pitchFamily="2" charset="-78"/>
                 <a:cs typeface="Amiri" pitchFamily="2" charset="-78"/>
               </a:rPr>
               <a:t>هٰذَا أَغْلَى مِنَ البَيْتِ الآخَرِ، لٰكِنَّهُ أَوْسَعُ وَأَهْدَأُ، فَأُرِيدُ أَنْ أَرَاهُ.</a:t>
@@ -11549,6 +11642,7 @@
                   <a:srgbClr val="1B3B6F"/>
                 </a:solidFill>
                 <a:latin typeface="Amiri" pitchFamily="2" charset="-78"/>
+                <a:ea typeface="Amiri" pitchFamily="2" charset="-78"/>
                 <a:cs typeface="Amiri" pitchFamily="2" charset="-78"/>
               </a:rPr>
               <a:t>يُوجَدُ مَوْقِفٌ، وَالإِيجَارُ أَلْفُ دِينَارٍ.</a:t>
@@ -11652,6 +11746,7 @@
                   <a:srgbClr val="1B3B6F"/>
                 </a:solidFill>
                 <a:latin typeface="Amiri" pitchFamily="2" charset="-78"/>
+                <a:ea typeface="Amiri" pitchFamily="2" charset="-78"/>
                 <a:cs typeface="Amiri" pitchFamily="2" charset="-78"/>
               </a:rPr>
               <a:t>يَوْمَ السَّبْتِ فِي السَّاعَةِ الحَادِيَةَ عَشْرَةَ، إِذَا كَانَ ذٰلِكَ مُنَاسِبًا.</a:t>
@@ -11728,6 +11823,7 @@
                   <a:srgbClr val="1B3B6F"/>
                 </a:solidFill>
                 <a:latin typeface="Amiri" pitchFamily="2" charset="-78"/>
+                <a:ea typeface="Amiri" pitchFamily="2" charset="-78"/>
                 <a:cs typeface="Amiri" pitchFamily="2" charset="-78"/>
               </a:rPr>
               <a:t>مَتَى تُرِيدُ أَنْ تَزُورَهُ؟</a:t>
@@ -11937,6 +12033,7 @@
                   <a:srgbClr val="D4AF37"/>
                 </a:solidFill>
                 <a:latin typeface="Amiri" pitchFamily="2" charset="-78"/>
+                <a:ea typeface="Amiri" pitchFamily="2" charset="-78"/>
                 <a:cs typeface="Amiri" pitchFamily="2" charset="-78"/>
               </a:rPr>
               <a:t>م</a:t>
@@ -12257,6 +12354,7 @@
                   <a:srgbClr val="8A6D1E"/>
                 </a:solidFill>
                 <a:latin typeface="Amiri" pitchFamily="2" charset="-78"/>
+                <a:ea typeface="Amiri" pitchFamily="2" charset="-78"/>
                 <a:cs typeface="Amiri" pitchFamily="2" charset="-78"/>
               </a:rPr>
               <a:t>نَمُوذَجُ الإِجَابَةِ</a:t>
@@ -12499,6 +12597,7 @@
                   <a:srgbClr val="1B3B6F"/>
                 </a:solidFill>
                 <a:latin typeface="Amiri" pitchFamily="2" charset="-78"/>
+                <a:ea typeface="Amiri" pitchFamily="2" charset="-78"/>
                 <a:cs typeface="Amiri" pitchFamily="2" charset="-78"/>
               </a:rPr>
               <a:t>أَفْهَمُ يَا أَبِي، لٰكِنَّ غُرْفَتِي صَغِيرَةٌ جِدًّا، وَلَا يُوجَدُ فِيهَا مَكَانٌ لِسَرِيرَيْنِ.</a:t>
@@ -12575,6 +12674,7 @@
                   <a:srgbClr val="1B3B6F"/>
                 </a:solidFill>
                 <a:latin typeface="Amiri" pitchFamily="2" charset="-78"/>
+                <a:ea typeface="Amiri" pitchFamily="2" charset="-78"/>
                 <a:cs typeface="Amiri" pitchFamily="2" charset="-78"/>
               </a:rPr>
               <a:t>جَدَّتُكَ سَتَسْكُنُ مَعَنَا، فَسَتَتَقَاسَمُ غُرْفَتَكَ مَعَ أَخِيكَ.</a:t>
@@ -12678,6 +12778,7 @@
                   <a:srgbClr val="1B3B6F"/>
                 </a:solidFill>
                 <a:latin typeface="Amiri" pitchFamily="2" charset="-78"/>
+                <a:ea typeface="Amiri" pitchFamily="2" charset="-78"/>
                 <a:cs typeface="Amiri" pitchFamily="2" charset="-78"/>
               </a:rPr>
               <a:t>مَا رَأْيُكَ أَنْ نَنْقُلَ المَكْتَبَ إِلَى غُرْفَةِ الجُلُوسِ، وَنَضَعَ سَرِيرًا بِطَابِقَيْنِ؟</a:t>
@@ -12754,6 +12855,7 @@
                   <a:srgbClr val="1B3B6F"/>
                 </a:solidFill>
                 <a:latin typeface="Amiri" pitchFamily="2" charset="-78"/>
+                <a:ea typeface="Amiri" pitchFamily="2" charset="-78"/>
                 <a:cs typeface="Amiri" pitchFamily="2" charset="-78"/>
               </a:rPr>
               <a:t>مَا اقْتِرَاحُكَ؟</a:t>
@@ -12857,6 +12959,7 @@
                   <a:srgbClr val="1B3B6F"/>
                 </a:solidFill>
                 <a:latin typeface="Amiri" pitchFamily="2" charset="-78"/>
+                <a:ea typeface="Amiri" pitchFamily="2" charset="-78"/>
                 <a:cs typeface="Amiri" pitchFamily="2" charset="-78"/>
               </a:rPr>
               <a:t>سَأَدْرُسُ فِي المَكْتَبَةِ بَعْدَ المَدْرَسَةِ، لِأَنَّهَا هَادِئَةٌ وَقَرِيبَةٌ مِنَ البَيْتِ.</a:t>
@@ -12933,6 +13036,7 @@
                   <a:srgbClr val="1B3B6F"/>
                 </a:solidFill>
                 <a:latin typeface="Amiri" pitchFamily="2" charset="-78"/>
+                <a:ea typeface="Amiri" pitchFamily="2" charset="-78"/>
                 <a:cs typeface="Amiri" pitchFamily="2" charset="-78"/>
               </a:rPr>
               <a:t>فِكْرَةٌ جَيِّدَةٌ. وَأَيْنَ تَدْرُسُ إِذَنْ؟</a:t>
@@ -13036,6 +13140,7 @@
                   <a:srgbClr val="1B3B6F"/>
                 </a:solidFill>
                 <a:latin typeface="Amiri" pitchFamily="2" charset="-78"/>
+                <a:ea typeface="Amiri" pitchFamily="2" charset="-78"/>
                 <a:cs typeface="Amiri" pitchFamily="2" charset="-78"/>
               </a:rPr>
               <a:t>هَلْ يُمْكِنُ أَنْ نَضَعَ قَاعِدَةً: كُلُّ وَاحِدٍ يُرَتِّبُ جِهَتَهُ كُلَّ مَسَاءٍ؟</a:t>
@@ -13112,6 +13217,7 @@
                   <a:srgbClr val="1B3B6F"/>
                 </a:solidFill>
                 <a:latin typeface="Amiri" pitchFamily="2" charset="-78"/>
+                <a:ea typeface="Amiri" pitchFamily="2" charset="-78"/>
                 <a:cs typeface="Amiri" pitchFamily="2" charset="-78"/>
               </a:rPr>
               <a:t>… أَخُوكَ يَتْرُكُ أَغْرَاضَهُ فِي كُلِّ مَكَانٍ!</a:t>
@@ -13215,6 +13321,7 @@
                   <a:srgbClr val="1B3B6F"/>
                 </a:solidFill>
                 <a:latin typeface="Amiri" pitchFamily="2" charset="-78"/>
+                <a:ea typeface="Amiri" pitchFamily="2" charset="-78"/>
                 <a:cs typeface="Amiri" pitchFamily="2" charset="-78"/>
               </a:rPr>
               <a:t>كَانَتْ زَرْقَاءَ، وَكَانَ فِيهَا سَرِيرٌ عَلَى شَكْلِ سَيَّارَةٍ، وَكُنْتُ أُحِبُّهُ كَثِيرًا!</a:t>
@@ -13291,6 +13398,7 @@
                   <a:srgbClr val="1B3B6F"/>
                 </a:solidFill>
                 <a:latin typeface="Amiri" pitchFamily="2" charset="-78"/>
+                <a:ea typeface="Amiri" pitchFamily="2" charset="-78"/>
                 <a:cs typeface="Amiri" pitchFamily="2" charset="-78"/>
               </a:rPr>
               <a:t>كَيْفَ كَانَتْ غُرْفَتُكَ عِنْدَمَا كُنْتَ صَغِيرًا؟</a:t>
@@ -13500,6 +13608,7 @@
                   <a:srgbClr val="D4AF37"/>
                 </a:solidFill>
                 <a:latin typeface="Amiri" pitchFamily="2" charset="-78"/>
+                <a:ea typeface="Amiri" pitchFamily="2" charset="-78"/>
                 <a:cs typeface="Amiri" pitchFamily="2" charset="-78"/>
               </a:rPr>
               <a:t>م</a:t>
@@ -13820,6 +13929,7 @@
                   <a:srgbClr val="8A6D1E"/>
                 </a:solidFill>
                 <a:latin typeface="Amiri" pitchFamily="2" charset="-78"/>
+                <a:ea typeface="Amiri" pitchFamily="2" charset="-78"/>
                 <a:cs typeface="Amiri" pitchFamily="2" charset="-78"/>
               </a:rPr>
               <a:t>نَمُوذَجُ الإِجَابَةِ</a:t>
@@ -14062,6 +14172,7 @@
                   <a:srgbClr val="1B3B6F"/>
                 </a:solidFill>
                 <a:latin typeface="Amiri" pitchFamily="2" charset="-78"/>
+                <a:ea typeface="Amiri" pitchFamily="2" charset="-78"/>
                 <a:cs typeface="Amiri" pitchFamily="2" charset="-78"/>
               </a:rPr>
               <a:t>أُفَضِّلُ المَدِينَةَ، لِأَنَّ كُلَّ شَيْءٍ قَرِيبٌ، وَلِأَنَّ المُوَاصَلَاتِ سَهْلَةٌ.</a:t>
@@ -14138,6 +14249,7 @@
                   <a:srgbClr val="1B3B6F"/>
                 </a:solidFill>
                 <a:latin typeface="Amiri" pitchFamily="2" charset="-78"/>
+                <a:ea typeface="Amiri" pitchFamily="2" charset="-78"/>
                 <a:cs typeface="Amiri" pitchFamily="2" charset="-78"/>
               </a:rPr>
               <a:t>أَيْنَ تُفَضِّلُ أَنْ تَسْكُنَ: فِي المَدِينَةِ أَمْ فِي الرِّيفِ؟</a:t>
@@ -14241,6 +14353,7 @@
                   <a:srgbClr val="1B3B6F"/>
                 </a:solidFill>
                 <a:latin typeface="Amiri" pitchFamily="2" charset="-78"/>
+                <a:ea typeface="Amiri" pitchFamily="2" charset="-78"/>
                 <a:cs typeface="Amiri" pitchFamily="2" charset="-78"/>
               </a:rPr>
               <a:t>المُشْكِلَةُ أَنَّ الشُّقَقَ صَغِيرَةٌ وَغَالِيَةٌ؛ مَثَلًا لَا تُوجَدُ فِي شَقَّتِنَا شُرْفَةٌ وَاحِدَةٌ.</a:t>
@@ -14317,6 +14430,7 @@
                   <a:srgbClr val="1B3B6F"/>
                 </a:solidFill>
                 <a:latin typeface="Amiri" pitchFamily="2" charset="-78"/>
+                <a:ea typeface="Amiri" pitchFamily="2" charset="-78"/>
                 <a:cs typeface="Amiri" pitchFamily="2" charset="-78"/>
               </a:rPr>
               <a:t>وَمَا عُيُوبُ السَّكَنِ فِي المَدِينَةِ؟</a:t>
@@ -14420,6 +14534,7 @@
                   <a:srgbClr val="1B3B6F"/>
                 </a:solidFill>
                 <a:latin typeface="Amiri" pitchFamily="2" charset="-78"/>
+                <a:ea typeface="Amiri" pitchFamily="2" charset="-78"/>
                 <a:cs typeface="Amiri" pitchFamily="2" charset="-78"/>
               </a:rPr>
               <a:t>كَانَتِ البُيُوتُ وَاسِعَةً، وَفِي وَسَطِهَا فِنَاءٌ تَجْلِسُ فِيهِ العَائِلَةُ، أَمَّا اليَوْمَ فَنَسْكُنُ فِي أَبْرَاجٍ عَالِيَةٍ.</a:t>
@@ -14496,6 +14611,7 @@
                   <a:srgbClr val="1B3B6F"/>
                 </a:solidFill>
                 <a:latin typeface="Amiri" pitchFamily="2" charset="-78"/>
+                <a:ea typeface="Amiri" pitchFamily="2" charset="-78"/>
                 <a:cs typeface="Amiri" pitchFamily="2" charset="-78"/>
               </a:rPr>
               <a:t>كَيْفَ كَانَتِ البُيُوتُ فِي أَيَّامِ أَجْدَادِكَ؟</a:t>
@@ -14599,6 +14715,7 @@
                   <a:srgbClr val="1B3B6F"/>
                 </a:solidFill>
                 <a:latin typeface="Amiri" pitchFamily="2" charset="-78"/>
+                <a:ea typeface="Amiri" pitchFamily="2" charset="-78"/>
                 <a:cs typeface="Amiri" pitchFamily="2" charset="-78"/>
               </a:rPr>
               <a:t>صَحِيحٌ أَنَّ الحَدَائِقَ العَامَّةَ مَوْجُودَةٌ، غَيْرَ أَنَّ الحَدِيقَةَ فِي البَيْتِ تُعْطِي الأَطْفَالَ حُرِّيَّةً وَأَمَانًا أَكْثَرَ.</a:t>
@@ -14675,6 +14792,7 @@
                   <a:srgbClr val="1B3B6F"/>
                 </a:solidFill>
                 <a:latin typeface="Amiri" pitchFamily="2" charset="-78"/>
+                <a:ea typeface="Amiri" pitchFamily="2" charset="-78"/>
                 <a:cs typeface="Amiri" pitchFamily="2" charset="-78"/>
               </a:rPr>
               <a:t>هَلِ الحَدَائِقُ ضَرُورِيَّةٌ لِلْأَطْفَالِ؟</a:t>
@@ -14778,6 +14896,7 @@
                   <a:srgbClr val="1B3B6F"/>
                 </a:solidFill>
                 <a:latin typeface="Amiri" pitchFamily="2" charset="-78"/>
+                <a:ea typeface="Amiri" pitchFamily="2" charset="-78"/>
                 <a:cs typeface="Amiri" pitchFamily="2" charset="-78"/>
               </a:rPr>
               <a:t>لَوْ صَمَّمْتُ بَيْتَ أَحْلَامِي، لَجَعَلْتُهُ عَلَى شَاطِئِ البَحْرِ، وَلَوَضَعْتُ فِيهِ مَكْتَبَةً كَبِيرَةً تُطِلُّ عَلَى المَاءِ.</a:t>
@@ -14854,6 +14973,7 @@
                   <a:srgbClr val="1B3B6F"/>
                 </a:solidFill>
                 <a:latin typeface="Amiri" pitchFamily="2" charset="-78"/>
+                <a:ea typeface="Amiri" pitchFamily="2" charset="-78"/>
                 <a:cs typeface="Amiri" pitchFamily="2" charset="-78"/>
               </a:rPr>
               <a:t>لَوْ صَمَّمْتَ بَيْتَ أَحْلَامِكَ، كَيْفَ يَكُونُ؟</a:t>
@@ -15063,6 +15183,7 @@
                   <a:srgbClr val="D4AF37"/>
                 </a:solidFill>
                 <a:latin typeface="Amiri" pitchFamily="2" charset="-78"/>
+                <a:ea typeface="Amiri" pitchFamily="2" charset="-78"/>
                 <a:cs typeface="Amiri" pitchFamily="2" charset="-78"/>
               </a:rPr>
               <a:t>م</a:t>
@@ -15383,6 +15504,7 @@
                   <a:srgbClr val="8A6D1E"/>
                 </a:solidFill>
                 <a:latin typeface="Amiri" pitchFamily="2" charset="-78"/>
+                <a:ea typeface="Amiri" pitchFamily="2" charset="-78"/>
                 <a:cs typeface="Amiri" pitchFamily="2" charset="-78"/>
               </a:rPr>
               <a:t>بَيْتِي</a:t>
@@ -15663,6 +15785,7 @@
                   <a:srgbClr val="1B3B6F"/>
                 </a:solidFill>
                 <a:latin typeface="Amiri" pitchFamily="2" charset="-78"/>
+                <a:ea typeface="Amiri" pitchFamily="2" charset="-78"/>
                 <a:cs typeface="Amiri" pitchFamily="2" charset="-78"/>
               </a:rPr>
               <a:t>أَسْكُنُ فِي … فِي …</a:t>
@@ -15739,6 +15862,7 @@
                   <a:srgbClr val="1B3B6F"/>
                 </a:solidFill>
                 <a:latin typeface="Amiri" pitchFamily="2" charset="-78"/>
+                <a:ea typeface="Amiri" pitchFamily="2" charset="-78"/>
                 <a:cs typeface="Amiri" pitchFamily="2" charset="-78"/>
               </a:rPr>
               <a:t>أَيْنَ تَسْكُنُ؟</a:t>
@@ -15907,6 +16031,7 @@
                   <a:srgbClr val="1B3B6F"/>
                 </a:solidFill>
                 <a:latin typeface="Amiri" pitchFamily="2" charset="-78"/>
+                <a:ea typeface="Amiri" pitchFamily="2" charset="-78"/>
                 <a:cs typeface="Amiri" pitchFamily="2" charset="-78"/>
               </a:rPr>
               <a:t>فِي بَيْتِي … غُرَفٍ</a:t>
@@ -15983,6 +16108,7 @@
                   <a:srgbClr val="1B3B6F"/>
                 </a:solidFill>
                 <a:latin typeface="Amiri" pitchFamily="2" charset="-78"/>
+                <a:ea typeface="Amiri" pitchFamily="2" charset="-78"/>
                 <a:cs typeface="Amiri" pitchFamily="2" charset="-78"/>
               </a:rPr>
               <a:t>كَمْ غُرْفَةً فِي بَيْتِكَ؟</a:t>
@@ -16151,6 +16277,7 @@
                   <a:srgbClr val="1B3B6F"/>
                 </a:solidFill>
                 <a:latin typeface="Amiri" pitchFamily="2" charset="-78"/>
+                <a:ea typeface="Amiri" pitchFamily="2" charset="-78"/>
                 <a:cs typeface="Amiri" pitchFamily="2" charset="-78"/>
               </a:rPr>
               <a:t>غُرْفَتِي … يُوجَدُ فِيهَا …</a:t>
@@ -16227,6 +16354,7 @@
                   <a:srgbClr val="1B3B6F"/>
                 </a:solidFill>
                 <a:latin typeface="Amiri" pitchFamily="2" charset="-78"/>
+                <a:ea typeface="Amiri" pitchFamily="2" charset="-78"/>
                 <a:cs typeface="Amiri" pitchFamily="2" charset="-78"/>
               </a:rPr>
               <a:t>صِفْ غُرْفَتَكَ.</a:t>
@@ -16395,6 +16523,7 @@
                   <a:srgbClr val="1B3B6F"/>
                 </a:solidFill>
                 <a:latin typeface="Amiri" pitchFamily="2" charset="-78"/>
+                <a:ea typeface="Amiri" pitchFamily="2" charset="-78"/>
                 <a:cs typeface="Amiri" pitchFamily="2" charset="-78"/>
               </a:rPr>
               <a:t>نَعَمْ، تُوجَدُ … / لَا، لَا تُوجَدُ …</a:t>
@@ -16471,6 +16600,7 @@
                   <a:srgbClr val="1B3B6F"/>
                 </a:solidFill>
                 <a:latin typeface="Amiri" pitchFamily="2" charset="-78"/>
+                <a:ea typeface="Amiri" pitchFamily="2" charset="-78"/>
                 <a:cs typeface="Amiri" pitchFamily="2" charset="-78"/>
               </a:rPr>
               <a:t>هَلْ تُوجَدُ حَدِيقَةٌ؟</a:t>
@@ -16639,6 +16769,7 @@
                   <a:srgbClr val="1B3B6F"/>
                 </a:solidFill>
                 <a:latin typeface="Amiri" pitchFamily="2" charset="-78"/>
+                <a:ea typeface="Amiri" pitchFamily="2" charset="-78"/>
                 <a:cs typeface="Amiri" pitchFamily="2" charset="-78"/>
               </a:rPr>
               <a:t>غُرْفَتِي المُفَضَّلَةُ … لِأَنَّ …</a:t>
@@ -16715,6 +16846,7 @@
                   <a:srgbClr val="1B3B6F"/>
                 </a:solidFill>
                 <a:latin typeface="Amiri" pitchFamily="2" charset="-78"/>
+                <a:ea typeface="Amiri" pitchFamily="2" charset="-78"/>
                 <a:cs typeface="Amiri" pitchFamily="2" charset="-78"/>
               </a:rPr>
               <a:t>مَا غُرْفَتُكَ المُفَضَّلَةُ؟</a:t>
@@ -16869,6 +17001,7 @@
                   <a:srgbClr val="1B3B6F"/>
                 </a:solidFill>
                 <a:latin typeface="Amiri" pitchFamily="2" charset="-78"/>
+                <a:ea typeface="Amiri" pitchFamily="2" charset="-78"/>
                 <a:cs typeface="Amiri" pitchFamily="2" charset="-78"/>
               </a:rPr>
               <a:t>عَفْوًا، هَلْ يُمْكِنُ أَنْ تُعِيدَ السُّؤَالَ؟</a:t>
@@ -17002,6 +17135,7 @@
                   <a:srgbClr val="D4AF37"/>
                 </a:solidFill>
                 <a:latin typeface="Amiri" pitchFamily="2" charset="-78"/>
+                <a:ea typeface="Amiri" pitchFamily="2" charset="-78"/>
                 <a:cs typeface="Amiri" pitchFamily="2" charset="-78"/>
               </a:rPr>
               <a:t>م</a:t>
@@ -17322,6 +17456,7 @@
                   <a:srgbClr val="8A6D1E"/>
                 </a:solidFill>
                 <a:latin typeface="Amiri" pitchFamily="2" charset="-78"/>
+                <a:ea typeface="Amiri" pitchFamily="2" charset="-78"/>
                 <a:cs typeface="Amiri" pitchFamily="2" charset="-78"/>
               </a:rPr>
               <a:t>بَيْتِي وَحَيِّي</a:t>
@@ -17602,6 +17737,7 @@
                   <a:srgbClr val="1B3B6F"/>
                 </a:solidFill>
                 <a:latin typeface="Amiri" pitchFamily="2" charset="-78"/>
+                <a:ea typeface="Amiri" pitchFamily="2" charset="-78"/>
                 <a:cs typeface="Amiri" pitchFamily="2" charset="-78"/>
               </a:rPr>
               <a:t>فِي الطَّابِقِ الأَرْضِيِّ يُوجَدُ … بِجَانِبِ …</a:t>
@@ -17678,6 +17814,7 @@
                   <a:srgbClr val="1B3B6F"/>
                 </a:solidFill>
                 <a:latin typeface="Amiri" pitchFamily="2" charset="-78"/>
+                <a:ea typeface="Amiri" pitchFamily="2" charset="-78"/>
                 <a:cs typeface="Amiri" pitchFamily="2" charset="-78"/>
               </a:rPr>
               <a:t>صِفِ الطَّابِقَ الأَرْضِيَّ فِي بَيْتِكَ.</a:t>
@@ -17781,6 +17918,7 @@
                   <a:srgbClr val="1B3B6F"/>
                 </a:solidFill>
                 <a:latin typeface="Amiri" pitchFamily="2" charset="-78"/>
+                <a:ea typeface="Amiri" pitchFamily="2" charset="-78"/>
                 <a:cs typeface="Amiri" pitchFamily="2" charset="-78"/>
               </a:rPr>
               <a:t>أُحِبُّ … لٰكِنِّي لَا أُحِبُّ …</a:t>
@@ -17857,6 +17995,7 @@
                   <a:srgbClr val="1B3B6F"/>
                 </a:solidFill>
                 <a:latin typeface="Amiri" pitchFamily="2" charset="-78"/>
+                <a:ea typeface="Amiri" pitchFamily="2" charset="-78"/>
                 <a:cs typeface="Amiri" pitchFamily="2" charset="-78"/>
               </a:rPr>
               <a:t>مَاذَا تُحِبُّ وَمَاذَا لَا تُحِبُّ فِي بَيْتِكَ؟</a:t>
@@ -17960,6 +18099,7 @@
                   <a:srgbClr val="1B3B6F"/>
                 </a:solidFill>
                 <a:latin typeface="Amiri" pitchFamily="2" charset="-78"/>
+                <a:ea typeface="Amiri" pitchFamily="2" charset="-78"/>
                 <a:cs typeface="Amiri" pitchFamily="2" charset="-78"/>
               </a:rPr>
               <a:t>حَيِّي … يُوجَدُ فِيهِ …</a:t>
@@ -18036,6 +18176,7 @@
                   <a:srgbClr val="1B3B6F"/>
                 </a:solidFill>
                 <a:latin typeface="Amiri" pitchFamily="2" charset="-78"/>
+                <a:ea typeface="Amiri" pitchFamily="2" charset="-78"/>
                 <a:cs typeface="Amiri" pitchFamily="2" charset="-78"/>
               </a:rPr>
               <a:t>صِفِ الحَيَّ الَّذِي تَسْكُنُ فِيهِ.</a:t>
@@ -18139,6 +18280,7 @@
                   <a:srgbClr val="1B3B6F"/>
                 </a:solidFill>
                 <a:latin typeface="Amiri" pitchFamily="2" charset="-78"/>
+                <a:ea typeface="Amiri" pitchFamily="2" charset="-78"/>
                 <a:cs typeface="Amiri" pitchFamily="2" charset="-78"/>
               </a:rPr>
               <a:t>فِي الصَّيْفِ … وَفِي …</a:t>
@@ -18215,6 +18357,7 @@
                   <a:srgbClr val="1B3B6F"/>
                 </a:solidFill>
                 <a:latin typeface="Amiri" pitchFamily="2" charset="-78"/>
+                <a:ea typeface="Amiri" pitchFamily="2" charset="-78"/>
                 <a:cs typeface="Amiri" pitchFamily="2" charset="-78"/>
               </a:rPr>
               <a:t>مَاذَا تَفْعَلُ فِي الحَدِيقَةِ؟</a:t>
@@ -18318,6 +18461,7 @@
                   <a:srgbClr val="1B3B6F"/>
                 </a:solidFill>
                 <a:latin typeface="Amiri" pitchFamily="2" charset="-78"/>
+                <a:ea typeface="Amiri" pitchFamily="2" charset="-78"/>
                 <a:cs typeface="Amiri" pitchFamily="2" charset="-78"/>
               </a:rPr>
               <a:t>نَعَمْ، كُنَّا نَسْكُنُ فِي … وَكَانَ …</a:t>
@@ -18394,6 +18538,7 @@
                   <a:srgbClr val="1B3B6F"/>
                 </a:solidFill>
                 <a:latin typeface="Amiri" pitchFamily="2" charset="-78"/>
+                <a:ea typeface="Amiri" pitchFamily="2" charset="-78"/>
                 <a:cs typeface="Amiri" pitchFamily="2" charset="-78"/>
               </a:rPr>
               <a:t>هَلْ سَكَنْتَ فِي بَيْتٍ آخَرَ مِنْ قَبْلُ؟</a:t>
@@ -18603,6 +18748,7 @@
                   <a:srgbClr val="D4AF37"/>
                 </a:solidFill>
                 <a:latin typeface="Amiri" pitchFamily="2" charset="-78"/>
+                <a:ea typeface="Amiri" pitchFamily="2" charset="-78"/>
                 <a:cs typeface="Amiri" pitchFamily="2" charset="-78"/>
               </a:rPr>
               <a:t>م</a:t>
@@ -18923,6 +19069,7 @@
                   <a:srgbClr val="8A6D1E"/>
                 </a:solidFill>
                 <a:latin typeface="Amiri" pitchFamily="2" charset="-78"/>
+                <a:ea typeface="Amiri" pitchFamily="2" charset="-78"/>
                 <a:cs typeface="Amiri" pitchFamily="2" charset="-78"/>
               </a:rPr>
               <a:t>السَّكَنُ وَالمُجْتَمَعُ</a:t>
@@ -19203,6 +19350,7 @@
                   <a:srgbClr val="1B3B6F"/>
                 </a:solidFill>
                 <a:latin typeface="Amiri" pitchFamily="2" charset="-78"/>
+                <a:ea typeface="Amiri" pitchFamily="2" charset="-78"/>
                 <a:cs typeface="Amiri" pitchFamily="2" charset="-78"/>
               </a:rPr>
               <a:t>أَعْتَقِدُ أَنَّ … أَهَمُّ مِنْ …</a:t>
@@ -19279,6 +19427,7 @@
                   <a:srgbClr val="1B3B6F"/>
                 </a:solidFill>
                 <a:latin typeface="Amiri" pitchFamily="2" charset="-78"/>
+                <a:ea typeface="Amiri" pitchFamily="2" charset="-78"/>
                 <a:cs typeface="Amiri" pitchFamily="2" charset="-78"/>
               </a:rPr>
               <a:t>مَا الَّذِي يَجْعَلُ البَيْتَ «بَيْتًا» فِي رَأْيِكَ؟</a:t>
@@ -19382,6 +19531,7 @@
                   <a:srgbClr val="1B3B6F"/>
                 </a:solidFill>
                 <a:latin typeface="Amiri" pitchFamily="2" charset="-78"/>
+                <a:ea typeface="Amiri" pitchFamily="2" charset="-78"/>
                 <a:cs typeface="Amiri" pitchFamily="2" charset="-78"/>
               </a:rPr>
               <a:t>لِأَنَّ … وَلِأَنَّ …</a:t>
@@ -19458,6 +19608,7 @@
                   <a:srgbClr val="1B3B6F"/>
                 </a:solidFill>
                 <a:latin typeface="Amiri" pitchFamily="2" charset="-78"/>
+                <a:ea typeface="Amiri" pitchFamily="2" charset="-78"/>
                 <a:cs typeface="Amiri" pitchFamily="2" charset="-78"/>
               </a:rPr>
               <a:t>لِمَاذَا يَصْعُبُ عَلَى الشَّبَابِ شِرَاءُ بَيْتٍ اليَوْمَ؟</a:t>
@@ -19561,6 +19712,7 @@
                   <a:srgbClr val="1B3B6F"/>
                 </a:solidFill>
                 <a:latin typeface="Amiri" pitchFamily="2" charset="-78"/>
+                <a:ea typeface="Amiri" pitchFamily="2" charset="-78"/>
                 <a:cs typeface="Amiri" pitchFamily="2" charset="-78"/>
               </a:rPr>
               <a:t>صَحِيحٌ أَنَّ … غَيْرَ أَنَّ …</a:t>
@@ -19637,6 +19789,7 @@
                   <a:srgbClr val="1B3B6F"/>
                 </a:solidFill>
                 <a:latin typeface="Amiri" pitchFamily="2" charset="-78"/>
+                <a:ea typeface="Amiri" pitchFamily="2" charset="-78"/>
                 <a:cs typeface="Amiri" pitchFamily="2" charset="-78"/>
               </a:rPr>
               <a:t>هَلْ تُفَضِّلُ بَيْتًا قَدِيمًا أَمْ حَدِيثًا؟</a:t>
@@ -19740,6 +19893,7 @@
                   <a:srgbClr val="1B3B6F"/>
                 </a:solidFill>
                 <a:latin typeface="Amiri" pitchFamily="2" charset="-78"/>
+                <a:ea typeface="Amiri" pitchFamily="2" charset="-78"/>
                 <a:cs typeface="Amiri" pitchFamily="2" charset="-78"/>
               </a:rPr>
               <a:t>زُرْتُ … وَكَانَ فِيهِ … فَجَلَسْنَا …</a:t>
@@ -19816,6 +19970,7 @@
                   <a:srgbClr val="1B3B6F"/>
                 </a:solidFill>
                 <a:latin typeface="Amiri" pitchFamily="2" charset="-78"/>
+                <a:ea typeface="Amiri" pitchFamily="2" charset="-78"/>
                 <a:cs typeface="Amiri" pitchFamily="2" charset="-78"/>
               </a:rPr>
               <a:t>صِفْ بَيْتًا زُرْتَهُ وَأَعْجَبَكَ.</a:t>
@@ -19919,6 +20074,7 @@
                   <a:srgbClr val="1B3B6F"/>
                 </a:solidFill>
                 <a:latin typeface="Amiri" pitchFamily="2" charset="-78"/>
+                <a:ea typeface="Amiri" pitchFamily="2" charset="-78"/>
                 <a:cs typeface="Amiri" pitchFamily="2" charset="-78"/>
               </a:rPr>
               <a:t>لَوْ سَكَنْتُ وَحْدِي، لَجَعَلْتُ …</a:t>
@@ -19995,6 +20151,7 @@
                   <a:srgbClr val="1B3B6F"/>
                 </a:solidFill>
                 <a:latin typeface="Amiri" pitchFamily="2" charset="-78"/>
+                <a:ea typeface="Amiri" pitchFamily="2" charset="-78"/>
                 <a:cs typeface="Amiri" pitchFamily="2" charset="-78"/>
               </a:rPr>
               <a:t>لَوْ سَكَنْتَ وَحْدَكَ، كَيْفَ تُرَتِّبُ بَيْتَكَ؟</a:t>
@@ -20204,6 +20361,7 @@
                   <a:srgbClr val="D4AF37"/>
                 </a:solidFill>
                 <a:latin typeface="Amiri" pitchFamily="2" charset="-78"/>
+                <a:ea typeface="Amiri" pitchFamily="2" charset="-78"/>
                 <a:cs typeface="Amiri" pitchFamily="2" charset="-78"/>
               </a:rPr>
               <a:t>م</a:t>
@@ -20524,6 +20682,7 @@
                   <a:srgbClr val="8A6D1E"/>
                 </a:solidFill>
                 <a:latin typeface="Amiri" pitchFamily="2" charset="-78"/>
+                <a:ea typeface="Amiri" pitchFamily="2" charset="-78"/>
                 <a:cs typeface="Amiri" pitchFamily="2" charset="-78"/>
               </a:rPr>
               <a:t>آدَابُ الصَّفِّ</a:t>
@@ -22055,6 +22214,7 @@
                   <a:srgbClr val="D4AF37"/>
                 </a:solidFill>
                 <a:latin typeface="Amiri" pitchFamily="2" charset="-78"/>
+                <a:ea typeface="Amiri" pitchFamily="2" charset="-78"/>
                 <a:cs typeface="Amiri" pitchFamily="2" charset="-78"/>
               </a:rPr>
               <a:t>م</a:t>
@@ -22375,6 +22535,7 @@
                   <a:srgbClr val="8A6D1E"/>
                 </a:solidFill>
                 <a:latin typeface="Amiri" pitchFamily="2" charset="-78"/>
+                <a:ea typeface="Amiri" pitchFamily="2" charset="-78"/>
                 <a:cs typeface="Amiri" pitchFamily="2" charset="-78"/>
               </a:rPr>
               <a:t>نَمُوذَجُ الإِجَابَةِ</a:t>
@@ -22617,6 +22778,7 @@
                   <a:srgbClr val="1B3B6F"/>
                 </a:solidFill>
                 <a:latin typeface="Amiri" pitchFamily="2" charset="-78"/>
+                <a:ea typeface="Amiri" pitchFamily="2" charset="-78"/>
                 <a:cs typeface="Amiri" pitchFamily="2" charset="-78"/>
               </a:rPr>
               <a:t>أَسْكُنُ فِي بَيْتٍ صَغِيرٍ فِي وَسَطِ المَدِينَةِ.</a:t>
@@ -22693,6 +22855,7 @@
                   <a:srgbClr val="1B3B6F"/>
                 </a:solidFill>
                 <a:latin typeface="Amiri" pitchFamily="2" charset="-78"/>
+                <a:ea typeface="Amiri" pitchFamily="2" charset="-78"/>
                 <a:cs typeface="Amiri" pitchFamily="2" charset="-78"/>
               </a:rPr>
               <a:t>أَيْنَ تَسْكُنُ؟</a:t>
@@ -22796,6 +22959,7 @@
                   <a:srgbClr val="1B3B6F"/>
                 </a:solidFill>
                 <a:latin typeface="Amiri" pitchFamily="2" charset="-78"/>
+                <a:ea typeface="Amiri" pitchFamily="2" charset="-78"/>
                 <a:cs typeface="Amiri" pitchFamily="2" charset="-78"/>
               </a:rPr>
               <a:t>فِي بَيْتِي سِتُّ غُرَفٍ، وَحَمَّامَانِ.</a:t>
@@ -22872,6 +23036,7 @@
                   <a:srgbClr val="1B3B6F"/>
                 </a:solidFill>
                 <a:latin typeface="Amiri" pitchFamily="2" charset="-78"/>
+                <a:ea typeface="Amiri" pitchFamily="2" charset="-78"/>
                 <a:cs typeface="Amiri" pitchFamily="2" charset="-78"/>
               </a:rPr>
               <a:t>كَمْ غُرْفَةً فِي بَيْتِكَ؟</a:t>
@@ -22975,6 +23140,7 @@
                   <a:srgbClr val="1B3B6F"/>
                 </a:solidFill>
                 <a:latin typeface="Amiri" pitchFamily="2" charset="-78"/>
+                <a:ea typeface="Amiri" pitchFamily="2" charset="-78"/>
                 <a:cs typeface="Amiri" pitchFamily="2" charset="-78"/>
               </a:rPr>
               <a:t>غُرْفَتِي صَغِيرَةٌ وَمُرَتَّبَةٌ، وَيُوجَدُ فِيهَا سَرِيرٌ وَمَكْتَبٌ.</a:t>
@@ -23051,6 +23217,7 @@
                   <a:srgbClr val="1B3B6F"/>
                 </a:solidFill>
                 <a:latin typeface="Amiri" pitchFamily="2" charset="-78"/>
+                <a:ea typeface="Amiri" pitchFamily="2" charset="-78"/>
                 <a:cs typeface="Amiri" pitchFamily="2" charset="-78"/>
               </a:rPr>
               <a:t>صِفْ غُرْفَتَكَ.</a:t>
@@ -23154,6 +23321,7 @@
                   <a:srgbClr val="1B3B6F"/>
                 </a:solidFill>
                 <a:latin typeface="Amiri" pitchFamily="2" charset="-78"/>
+                <a:ea typeface="Amiri" pitchFamily="2" charset="-78"/>
                 <a:cs typeface="Amiri" pitchFamily="2" charset="-78"/>
               </a:rPr>
               <a:t>نَعَمْ، تُوجَدُ حَدِيقَةٌ صَغِيرَةٌ خَلْفَ البَيْتِ، فِيهَا أَزْهَارٌ.</a:t>
@@ -23230,6 +23398,7 @@
                   <a:srgbClr val="1B3B6F"/>
                 </a:solidFill>
                 <a:latin typeface="Amiri" pitchFamily="2" charset="-78"/>
+                <a:ea typeface="Amiri" pitchFamily="2" charset="-78"/>
                 <a:cs typeface="Amiri" pitchFamily="2" charset="-78"/>
               </a:rPr>
               <a:t>هَلْ تُوجَدُ حَدِيقَةٌ؟</a:t>
@@ -23333,6 +23502,7 @@
                   <a:srgbClr val="1B3B6F"/>
                 </a:solidFill>
                 <a:latin typeface="Amiri" pitchFamily="2" charset="-78"/>
+                <a:ea typeface="Amiri" pitchFamily="2" charset="-78"/>
                 <a:cs typeface="Amiri" pitchFamily="2" charset="-78"/>
               </a:rPr>
               <a:t>غُرْفَتِي المُفَضَّلَةُ هِيَ المَطْبَخُ، لِأَنِّي أُحِبُّ الطَّبْخَ مَعَ أُمِّي.</a:t>
@@ -23409,6 +23579,7 @@
                   <a:srgbClr val="1B3B6F"/>
                 </a:solidFill>
                 <a:latin typeface="Amiri" pitchFamily="2" charset="-78"/>
+                <a:ea typeface="Amiri" pitchFamily="2" charset="-78"/>
                 <a:cs typeface="Amiri" pitchFamily="2" charset="-78"/>
               </a:rPr>
               <a:t>مَا غُرْفَتُكَ المُفَضَّلَةُ؟</a:t>
@@ -23618,6 +23789,7 @@
                   <a:srgbClr val="D4AF37"/>
                 </a:solidFill>
                 <a:latin typeface="Amiri" pitchFamily="2" charset="-78"/>
+                <a:ea typeface="Amiri" pitchFamily="2" charset="-78"/>
                 <a:cs typeface="Amiri" pitchFamily="2" charset="-78"/>
               </a:rPr>
               <a:t>م</a:t>
@@ -23938,6 +24110,7 @@
                   <a:srgbClr val="8A6D1E"/>
                 </a:solidFill>
                 <a:latin typeface="Amiri" pitchFamily="2" charset="-78"/>
+                <a:ea typeface="Amiri" pitchFamily="2" charset="-78"/>
                 <a:cs typeface="Amiri" pitchFamily="2" charset="-78"/>
               </a:rPr>
               <a:t>نَمُوذَجُ الإِجَابَةِ</a:t>
@@ -24180,6 +24353,7 @@
                   <a:srgbClr val="1B3B6F"/>
                 </a:solidFill>
                 <a:latin typeface="Amiri" pitchFamily="2" charset="-78"/>
+                <a:ea typeface="Amiri" pitchFamily="2" charset="-78"/>
                 <a:cs typeface="Amiri" pitchFamily="2" charset="-78"/>
               </a:rPr>
               <a:t>فِي الطَّابِقِ الأَرْضِيِّ يُوجَدُ مَطْبَخٌ كَبِيرٌ بِجَانِبِ غُرْفَةِ الطَّعَامِ، وَغُرْفَةُ الجُلُوسِ أَمَامَ البَابِ.</a:t>
@@ -24256,6 +24430,7 @@
                   <a:srgbClr val="1B3B6F"/>
                 </a:solidFill>
                 <a:latin typeface="Amiri" pitchFamily="2" charset="-78"/>
+                <a:ea typeface="Amiri" pitchFamily="2" charset="-78"/>
                 <a:cs typeface="Amiri" pitchFamily="2" charset="-78"/>
               </a:rPr>
               <a:t>صِفِ الطَّابِقَ الأَرْضِيَّ فِي بَيْتِكَ.</a:t>
@@ -24359,6 +24534,7 @@
                   <a:srgbClr val="1B3B6F"/>
                 </a:solidFill>
                 <a:latin typeface="Amiri" pitchFamily="2" charset="-78"/>
+                <a:ea typeface="Amiri" pitchFamily="2" charset="-78"/>
                 <a:cs typeface="Amiri" pitchFamily="2" charset="-78"/>
               </a:rPr>
               <a:t>أُحِبُّ الحَدِيقَةَ لِأَنَّهَا هَادِئَةٌ، لٰكِنِّي لَا أُحِبُّ أَنَّ الحَمَّامَ وَاحِدٌ لِخَمْسَةِ أَشْخَاصٍ!</a:t>
@@ -24435,6 +24611,7 @@
                   <a:srgbClr val="1B3B6F"/>
                 </a:solidFill>
                 <a:latin typeface="Amiri" pitchFamily="2" charset="-78"/>
+                <a:ea typeface="Amiri" pitchFamily="2" charset="-78"/>
                 <a:cs typeface="Amiri" pitchFamily="2" charset="-78"/>
               </a:rPr>
               <a:t>مَاذَا تُحِبُّ وَمَاذَا لَا تُحِبُّ فِي بَيْتِكَ؟</a:t>
@@ -24538,6 +24715,7 @@
                   <a:srgbClr val="1B3B6F"/>
                 </a:solidFill>
                 <a:latin typeface="Amiri" pitchFamily="2" charset="-78"/>
+                <a:ea typeface="Amiri" pitchFamily="2" charset="-78"/>
                 <a:cs typeface="Amiri" pitchFamily="2" charset="-78"/>
               </a:rPr>
               <a:t>حَيِّي هَادِئٌ، يُوجَدُ فِيهِ مَسْجِدٌ وَمَخْبَزٌ وَحَدِيقَةٌ عَامَّةٌ قَرِيبَةٌ مِنْ بَيْتِنَا.</a:t>
@@ -24614,6 +24792,7 @@
                   <a:srgbClr val="1B3B6F"/>
                 </a:solidFill>
                 <a:latin typeface="Amiri" pitchFamily="2" charset="-78"/>
+                <a:ea typeface="Amiri" pitchFamily="2" charset="-78"/>
                 <a:cs typeface="Amiri" pitchFamily="2" charset="-78"/>
               </a:rPr>
               <a:t>صِفِ الحَيَّ الَّذِي تَسْكُنُ فِيهِ.</a:t>
@@ -24717,6 +24896,7 @@
                   <a:srgbClr val="1B3B6F"/>
                 </a:solidFill>
                 <a:latin typeface="Amiri" pitchFamily="2" charset="-78"/>
+                <a:ea typeface="Amiri" pitchFamily="2" charset="-78"/>
                 <a:cs typeface="Amiri" pitchFamily="2" charset="-78"/>
               </a:rPr>
               <a:t>فِي الصَّيْفِ نَأْكُلُ العَشَاءَ فِي الحَدِيقَةِ، وَفِي الرَّبِيعِ أُسَاعِدُ أَبِي فِي زِرَاعَةِ الأَزْهَارِ.</a:t>
@@ -24793,6 +24973,7 @@
                   <a:srgbClr val="1B3B6F"/>
                 </a:solidFill>
                 <a:latin typeface="Amiri" pitchFamily="2" charset="-78"/>
+                <a:ea typeface="Amiri" pitchFamily="2" charset="-78"/>
                 <a:cs typeface="Amiri" pitchFamily="2" charset="-78"/>
               </a:rPr>
               <a:t>مَاذَا تَفْعَلُ فِي الحَدِيقَةِ؟</a:t>
@@ -24896,6 +25077,7 @@
                   <a:srgbClr val="1B3B6F"/>
                 </a:solidFill>
                 <a:latin typeface="Amiri" pitchFamily="2" charset="-78"/>
+                <a:ea typeface="Amiri" pitchFamily="2" charset="-78"/>
                 <a:cs typeface="Amiri" pitchFamily="2" charset="-78"/>
               </a:rPr>
               <a:t>نَعَمْ، كُنَّا نَسْكُنُ فِي شَقَّةٍ صَغِيرَةٍ فِي الطَّابِقِ العَاشِرِ، وَكَانَ المِصْعَدُ مُعَطَّلًا دَائِمًا!</a:t>
@@ -24972,6 +25154,7 @@
                   <a:srgbClr val="1B3B6F"/>
                 </a:solidFill>
                 <a:latin typeface="Amiri" pitchFamily="2" charset="-78"/>
+                <a:ea typeface="Amiri" pitchFamily="2" charset="-78"/>
                 <a:cs typeface="Amiri" pitchFamily="2" charset="-78"/>
               </a:rPr>
               <a:t>هَلْ سَكَنْتَ فِي بَيْتٍ آخَرَ مِنْ قَبْلُ؟</a:t>
@@ -25181,6 +25364,7 @@
                   <a:srgbClr val="D4AF37"/>
                 </a:solidFill>
                 <a:latin typeface="Amiri" pitchFamily="2" charset="-78"/>
+                <a:ea typeface="Amiri" pitchFamily="2" charset="-78"/>
                 <a:cs typeface="Amiri" pitchFamily="2" charset="-78"/>
               </a:rPr>
               <a:t>م</a:t>
@@ -25501,6 +25685,7 @@
                   <a:srgbClr val="8A6D1E"/>
                 </a:solidFill>
                 <a:latin typeface="Amiri" pitchFamily="2" charset="-78"/>
+                <a:ea typeface="Amiri" pitchFamily="2" charset="-78"/>
                 <a:cs typeface="Amiri" pitchFamily="2" charset="-78"/>
               </a:rPr>
               <a:t>نَمُوذَجُ الإِجَابَةِ</a:t>
@@ -25743,6 +25928,7 @@
                   <a:srgbClr val="1B3B6F"/>
                 </a:solidFill>
                 <a:latin typeface="Amiri" pitchFamily="2" charset="-78"/>
+                <a:ea typeface="Amiri" pitchFamily="2" charset="-78"/>
                 <a:cs typeface="Amiri" pitchFamily="2" charset="-78"/>
               </a:rPr>
               <a:t>أَعْتَقِدُ أَنَّ النَّاسَ الَّذِينَ يَسْكُنُونَ فِيهِ أَهَمُّ مِنْ حَجْمِهِ أَوْ أَثَاثِهِ، فَالحُبُّ يَجْعَلُ الغُرْفَةَ الصَّغِيرَةَ وَاسِعَةً.</a:t>
@@ -25819,6 +26005,7 @@
                   <a:srgbClr val="1B3B6F"/>
                 </a:solidFill>
                 <a:latin typeface="Amiri" pitchFamily="2" charset="-78"/>
+                <a:ea typeface="Amiri" pitchFamily="2" charset="-78"/>
                 <a:cs typeface="Amiri" pitchFamily="2" charset="-78"/>
               </a:rPr>
               <a:t>مَا الَّذِي يَجْعَلُ البَيْتَ «بَيْتًا» فِي رَأْيِكَ؟</a:t>
@@ -25922,6 +26109,7 @@
                   <a:srgbClr val="1B3B6F"/>
                 </a:solidFill>
                 <a:latin typeface="Amiri" pitchFamily="2" charset="-78"/>
+                <a:ea typeface="Amiri" pitchFamily="2" charset="-78"/>
                 <a:cs typeface="Amiri" pitchFamily="2" charset="-78"/>
               </a:rPr>
               <a:t>لِأَنَّ الأَسْعَارَ ارْتَفَعَتْ كَثِيرًا، وَلِأَنَّ الرَّوَاتِبَ لَمْ تَرْتَفِعْ بِالسُّرْعَةِ نَفْسِهَا.</a:t>
@@ -25998,6 +26186,7 @@
                   <a:srgbClr val="1B3B6F"/>
                 </a:solidFill>
                 <a:latin typeface="Amiri" pitchFamily="2" charset="-78"/>
+                <a:ea typeface="Amiri" pitchFamily="2" charset="-78"/>
                 <a:cs typeface="Amiri" pitchFamily="2" charset="-78"/>
               </a:rPr>
               <a:t>لِمَاذَا يَصْعُبُ عَلَى الشَّبَابِ شِرَاءُ بَيْتٍ اليَوْمَ؟</a:t>
@@ -26101,6 +26290,7 @@
                   <a:srgbClr val="1B3B6F"/>
                 </a:solidFill>
                 <a:latin typeface="Amiri" pitchFamily="2" charset="-78"/>
+                <a:ea typeface="Amiri" pitchFamily="2" charset="-78"/>
                 <a:cs typeface="Amiri" pitchFamily="2" charset="-78"/>
               </a:rPr>
               <a:t>صَحِيحٌ أَنَّ البُيُوتَ الحَدِيثَةَ مُرِيحَةٌ وَمُجَهَّزَةٌ، غَيْرَ أَنَّ البُيُوتَ القَدِيمَةَ لَهَا رُوحٌ وَتَارِيخٌ.</a:t>
@@ -26177,6 +26367,7 @@
                   <a:srgbClr val="1B3B6F"/>
                 </a:solidFill>
                 <a:latin typeface="Amiri" pitchFamily="2" charset="-78"/>
+                <a:ea typeface="Amiri" pitchFamily="2" charset="-78"/>
                 <a:cs typeface="Amiri" pitchFamily="2" charset="-78"/>
               </a:rPr>
               <a:t>هَلْ تُفَضِّلُ بَيْتًا قَدِيمًا أَمْ حَدِيثًا؟</a:t>
@@ -26386,6 +26577,7 @@
                   <a:srgbClr val="D4AF37"/>
                 </a:solidFill>
                 <a:latin typeface="Amiri" pitchFamily="2" charset="-78"/>
+                <a:ea typeface="Amiri" pitchFamily="2" charset="-78"/>
                 <a:cs typeface="Amiri" pitchFamily="2" charset="-78"/>
               </a:rPr>
               <a:t>م</a:t>
@@ -26706,6 +26898,7 @@
                   <a:srgbClr val="8A6D1E"/>
                 </a:solidFill>
                 <a:latin typeface="Amiri" pitchFamily="2" charset="-78"/>
+                <a:ea typeface="Amiri" pitchFamily="2" charset="-78"/>
                 <a:cs typeface="Amiri" pitchFamily="2" charset="-78"/>
               </a:rPr>
               <a:t>نَمُوذَجُ الإِجَابَةِ</a:t>
@@ -26948,6 +27141,7 @@
                   <a:srgbClr val="1B3B6F"/>
                 </a:solidFill>
                 <a:latin typeface="Amiri" pitchFamily="2" charset="-78"/>
+                <a:ea typeface="Amiri" pitchFamily="2" charset="-78"/>
                 <a:cs typeface="Amiri" pitchFamily="2" charset="-78"/>
               </a:rPr>
               <a:t>زُرْتُ بَيْتَ عَمِّي فِي القَرْيَةِ، وَكَانَ فِيهِ فِنَاءٌ وَاسِعٌ وَشَجَرَةُ لَيْمُونٍ، فَجَلَسْنَا تَحْتَهَا حَتَّى مُنْتَصَفِ اللَّيْلِ.</a:t>
@@ -27024,6 +27218,7 @@
                   <a:srgbClr val="1B3B6F"/>
                 </a:solidFill>
                 <a:latin typeface="Amiri" pitchFamily="2" charset="-78"/>
+                <a:ea typeface="Amiri" pitchFamily="2" charset="-78"/>
                 <a:cs typeface="Amiri" pitchFamily="2" charset="-78"/>
               </a:rPr>
               <a:t>صِفْ بَيْتًا زُرْتَهُ وَأَعْجَبَكَ.</a:t>
@@ -27127,6 +27322,7 @@
                   <a:srgbClr val="1B3B6F"/>
                 </a:solidFill>
                 <a:latin typeface="Amiri" pitchFamily="2" charset="-78"/>
+                <a:ea typeface="Amiri" pitchFamily="2" charset="-78"/>
                 <a:cs typeface="Amiri" pitchFamily="2" charset="-78"/>
               </a:rPr>
               <a:t>لَوْ سَكَنْتُ وَحْدِي، لَجَعَلْتُ غُرْفَةَ الجُلُوسِ مَكْتَبَةً، وَلَزَرَعْتُ نَبَاتَاتٍ فِي كُلِّ زَاوِيَةٍ.</a:t>
@@ -27203,6 +27399,7 @@
                   <a:srgbClr val="1B3B6F"/>
                 </a:solidFill>
                 <a:latin typeface="Amiri" pitchFamily="2" charset="-78"/>
+                <a:ea typeface="Amiri" pitchFamily="2" charset="-78"/>
                 <a:cs typeface="Amiri" pitchFamily="2" charset="-78"/>
               </a:rPr>
               <a:t>لَوْ سَكَنْتَ وَحْدَكَ، كَيْفَ تُرَتِّبُ بَيْتَكَ؟</a:t>
@@ -27412,6 +27609,7 @@
                   <a:srgbClr val="D4AF37"/>
                 </a:solidFill>
                 <a:latin typeface="Amiri" pitchFamily="2" charset="-78"/>
+                <a:ea typeface="Amiri" pitchFamily="2" charset="-78"/>
                 <a:cs typeface="Amiri" pitchFamily="2" charset="-78"/>
               </a:rPr>
               <a:t>م</a:t>
@@ -27732,6 +27930,7 @@
                   <a:srgbClr val="8A6D1E"/>
                 </a:solidFill>
                 <a:latin typeface="Amiri" pitchFamily="2" charset="-78"/>
+                <a:ea typeface="Amiri" pitchFamily="2" charset="-78"/>
                 <a:cs typeface="Amiri" pitchFamily="2" charset="-78"/>
               </a:rPr>
               <a:t>قَيِّمْ عَمَلَكَ</a:t>
@@ -28976,6 +29175,7 @@
                   <a:srgbClr val="FFFFFF"/>
                 </a:solidFill>
                 <a:latin typeface="Amiri" pitchFamily="2" charset="-78"/>
+                <a:ea typeface="Amiri" pitchFamily="2" charset="-78"/>
                 <a:cs typeface="Amiri" pitchFamily="2" charset="-78"/>
               </a:rPr>
               <a:t>أَحْسَنْتُمْ! إِلَى اللِّقَاءِ</a:t>
@@ -29128,6 +29328,7 @@
                   <a:srgbClr val="D4AF37"/>
                 </a:solidFill>
                 <a:latin typeface="Amiri" pitchFamily="2" charset="-78"/>
+                <a:ea typeface="Amiri" pitchFamily="2" charset="-78"/>
                 <a:cs typeface="Amiri" pitchFamily="2" charset="-78"/>
               </a:rPr>
               <a:t>وَرْشَةُ الكِتَابَةِ</a:t>
@@ -29261,6 +29462,7 @@
                   <a:srgbClr val="D4AF37"/>
                 </a:solidFill>
                 <a:latin typeface="Amiri" pitchFamily="2" charset="-78"/>
+                <a:ea typeface="Amiri" pitchFamily="2" charset="-78"/>
                 <a:cs typeface="Amiri" pitchFamily="2" charset="-78"/>
               </a:rPr>
               <a:t>م</a:t>
@@ -29581,6 +29783,7 @@
                   <a:srgbClr val="8A6D1E"/>
                 </a:solidFill>
                 <a:latin typeface="Amiri" pitchFamily="2" charset="-78"/>
+                <a:ea typeface="Amiri" pitchFamily="2" charset="-78"/>
                 <a:cs typeface="Amiri" pitchFamily="2" charset="-78"/>
               </a:rPr>
               <a:t>خَرِيطَةُ الوَرْشَةِ</a:t>
@@ -29895,6 +30098,7 @@
                   <a:srgbClr val="1B3B6F"/>
                 </a:solidFill>
                 <a:latin typeface="Amiri" pitchFamily="2" charset="-78"/>
+                <a:ea typeface="Amiri" pitchFamily="2" charset="-78"/>
                 <a:cs typeface="Amiri" pitchFamily="2" charset="-78"/>
               </a:rPr>
               <a:t>كَيْفَ</a:t>
@@ -30171,6 +30375,7 @@
                   <a:srgbClr val="1E6B52"/>
                 </a:solidFill>
                 <a:latin typeface="Amiri" pitchFamily="2" charset="-78"/>
+                <a:ea typeface="Amiri" pitchFamily="2" charset="-78"/>
                 <a:cs typeface="Amiri" pitchFamily="2" charset="-78"/>
               </a:rPr>
               <a:t>تَمْثِيلُ الدَّوْرِ</a:t>
@@ -30447,6 +30652,7 @@
                   <a:srgbClr val="8A6D1E"/>
                 </a:solidFill>
                 <a:latin typeface="Amiri" pitchFamily="2" charset="-78"/>
+                <a:ea typeface="Amiri" pitchFamily="2" charset="-78"/>
                 <a:cs typeface="Amiri" pitchFamily="2" charset="-78"/>
               </a:rPr>
               <a:t>النَّمُوذَجُ</a:t>
@@ -30723,6 +30929,7 @@
                   <a:srgbClr val="1E6B52"/>
                 </a:solidFill>
                 <a:latin typeface="Amiri" pitchFamily="2" charset="-78"/>
+                <a:ea typeface="Amiri" pitchFamily="2" charset="-78"/>
                 <a:cs typeface="Amiri" pitchFamily="2" charset="-78"/>
               </a:rPr>
               <a:t>المُحَادَثَةُ</a:t>
@@ -30999,6 +31206,7 @@
                   <a:srgbClr val="8A6D1E"/>
                 </a:solidFill>
                 <a:latin typeface="Amiri" pitchFamily="2" charset="-78"/>
+                <a:ea typeface="Amiri" pitchFamily="2" charset="-78"/>
                 <a:cs typeface="Amiri" pitchFamily="2" charset="-78"/>
               </a:rPr>
               <a:t>قَيِّمْ</a:t>
@@ -31242,6 +31450,7 @@
                   <a:srgbClr val="D4AF37"/>
                 </a:solidFill>
                 <a:latin typeface="Amiri" pitchFamily="2" charset="-78"/>
+                <a:ea typeface="Amiri" pitchFamily="2" charset="-78"/>
                 <a:cs typeface="Amiri" pitchFamily="2" charset="-78"/>
               </a:rPr>
               <a:t>م</a:t>
@@ -31562,6 +31771,7 @@
                   <a:srgbClr val="8A6D1E"/>
                 </a:solidFill>
                 <a:latin typeface="Amiri" pitchFamily="2" charset="-78"/>
+                <a:ea typeface="Amiri" pitchFamily="2" charset="-78"/>
                 <a:cs typeface="Amiri" pitchFamily="2" charset="-78"/>
               </a:rPr>
               <a:t>امْتِحَانُ التَّحَدُّثِ</a:t>
@@ -32186,6 +32396,7 @@
                   <a:srgbClr val="1B3B6F"/>
                 </a:solidFill>
                 <a:latin typeface="Amiri" pitchFamily="2" charset="-78"/>
+                <a:ea typeface="Amiri" pitchFamily="2" charset="-78"/>
                 <a:cs typeface="Amiri" pitchFamily="2" charset="-78"/>
               </a:rPr>
               <a:t>عَفْوًا، هَلْ يُمْكِنُ أَنْ تُعِيدَ السُّؤَالَ؟</a:t>
@@ -32285,6 +32496,7 @@
                   <a:srgbClr val="1B3B6F"/>
                 </a:solidFill>
                 <a:latin typeface="Amiri" pitchFamily="2" charset="-78"/>
+                <a:ea typeface="Amiri" pitchFamily="2" charset="-78"/>
                 <a:cs typeface="Amiri" pitchFamily="2" charset="-78"/>
               </a:rPr>
               <a:t>لَحْظَةً، دَعْنِي أُفَكِّرُ …</a:t>
@@ -32384,6 +32596,7 @@
                   <a:srgbClr val="1B3B6F"/>
                 </a:solidFill>
                 <a:latin typeface="Amiri" pitchFamily="2" charset="-78"/>
+                <a:ea typeface="Amiri" pitchFamily="2" charset="-78"/>
                 <a:cs typeface="Amiri" pitchFamily="2" charset="-78"/>
               </a:rPr>
               <a:t>أَقْصِدُ …</a:t>
@@ -32555,6 +32768,7 @@
                   <a:srgbClr val="D4AF37"/>
                 </a:solidFill>
                 <a:latin typeface="Amiri" pitchFamily="2" charset="-78"/>
+                <a:ea typeface="Amiri" pitchFamily="2" charset="-78"/>
                 <a:cs typeface="Amiri" pitchFamily="2" charset="-78"/>
               </a:rPr>
               <a:t>م</a:t>
@@ -32875,6 +33089,7 @@
                   <a:srgbClr val="8A6D1E"/>
                 </a:solidFill>
                 <a:latin typeface="Amiri" pitchFamily="2" charset="-78"/>
+                <a:ea typeface="Amiri" pitchFamily="2" charset="-78"/>
                 <a:cs typeface="Amiri" pitchFamily="2" charset="-78"/>
               </a:rPr>
               <a:t>أَيْنَ تَسْكُنُ؟</a:t>
@@ -33178,6 +33393,7 @@
                   <a:srgbClr val="1B3B6F"/>
                 </a:solidFill>
                 <a:latin typeface="Amiri" pitchFamily="2" charset="-78"/>
+                <a:ea typeface="Amiri" pitchFamily="2" charset="-78"/>
                 <a:cs typeface="Amiri" pitchFamily="2" charset="-78"/>
               </a:rPr>
               <a:t>أَسْكُنُ فِي …</a:t>
@@ -33335,6 +33551,7 @@
                   <a:srgbClr val="1B3B6F"/>
                 </a:solidFill>
                 <a:latin typeface="Amiri" pitchFamily="2" charset="-78"/>
+                <a:ea typeface="Amiri" pitchFamily="2" charset="-78"/>
                 <a:cs typeface="Amiri" pitchFamily="2" charset="-78"/>
               </a:rPr>
               <a:t>نَسْكُنُ</a:t>
@@ -33438,6 +33655,7 @@
                   <a:srgbClr val="1B3B6F"/>
                 </a:solidFill>
                 <a:latin typeface="Amiri" pitchFamily="2" charset="-78"/>
+                <a:ea typeface="Amiri" pitchFamily="2" charset="-78"/>
                 <a:cs typeface="Amiri" pitchFamily="2" charset="-78"/>
               </a:rPr>
               <a:t>تَسْكُنُ</a:t>
@@ -33541,6 +33759,7 @@
                   <a:srgbClr val="1B3B6F"/>
                 </a:solidFill>
                 <a:latin typeface="Amiri" pitchFamily="2" charset="-78"/>
+                <a:ea typeface="Amiri" pitchFamily="2" charset="-78"/>
                 <a:cs typeface="Amiri" pitchFamily="2" charset="-78"/>
               </a:rPr>
               <a:t>يَسْكُنُ</a:t>
@@ -33806,6 +34025,7 @@
                   <a:srgbClr val="1B3B6F"/>
                 </a:solidFill>
                 <a:latin typeface="Amiri" pitchFamily="2" charset="-78"/>
+                <a:ea typeface="Amiri" pitchFamily="2" charset="-78"/>
                 <a:cs typeface="Amiri" pitchFamily="2" charset="-78"/>
               </a:rPr>
               <a:t>بَيْتٌ · شَقَّةٌ</a:t>
@@ -33963,6 +34183,7 @@
                   <a:srgbClr val="1B3B6F"/>
                 </a:solidFill>
                 <a:latin typeface="Amiri" pitchFamily="2" charset="-78"/>
+                <a:ea typeface="Amiri" pitchFamily="2" charset="-78"/>
                 <a:cs typeface="Amiri" pitchFamily="2" charset="-78"/>
               </a:rPr>
               <a:t>بُيُوتٌ · شُقَقٌ</a:t>
@@ -34228,6 +34449,7 @@
                   <a:srgbClr val="1B3B6F"/>
                 </a:solidFill>
                 <a:latin typeface="Amiri" pitchFamily="2" charset="-78"/>
+                <a:ea typeface="Amiri" pitchFamily="2" charset="-78"/>
                 <a:cs typeface="Amiri" pitchFamily="2" charset="-78"/>
               </a:rPr>
               <a:t>غُرْفَةٌ</a:t>
@@ -34385,6 +34607,7 @@
                   <a:srgbClr val="1B3B6F"/>
                 </a:solidFill>
                 <a:latin typeface="Amiri" pitchFamily="2" charset="-78"/>
+                <a:ea typeface="Amiri" pitchFamily="2" charset="-78"/>
                 <a:cs typeface="Amiri" pitchFamily="2" charset="-78"/>
               </a:rPr>
               <a:t>غُرْفَتِي</a:t>
@@ -34488,6 +34711,7 @@
                   <a:srgbClr val="1B3B6F"/>
                 </a:solidFill>
                 <a:latin typeface="Amiri" pitchFamily="2" charset="-78"/>
+                <a:ea typeface="Amiri" pitchFamily="2" charset="-78"/>
                 <a:cs typeface="Amiri" pitchFamily="2" charset="-78"/>
               </a:rPr>
               <a:t>غُرَفٌ</a:t>
@@ -34591,6 +34815,7 @@
                   <a:srgbClr val="1B3B6F"/>
                 </a:solidFill>
                 <a:latin typeface="Amiri" pitchFamily="2" charset="-78"/>
+                <a:ea typeface="Amiri" pitchFamily="2" charset="-78"/>
                 <a:cs typeface="Amiri" pitchFamily="2" charset="-78"/>
               </a:rPr>
               <a:t>غُرْفَةٌ</a:t>
@@ -34856,6 +35081,7 @@
                   <a:srgbClr val="1B3B6F"/>
                 </a:solidFill>
                 <a:latin typeface="Amiri" pitchFamily="2" charset="-78"/>
+                <a:ea typeface="Amiri" pitchFamily="2" charset="-78"/>
                 <a:cs typeface="Amiri" pitchFamily="2" charset="-78"/>
               </a:rPr>
               <a:t>يُوجَدُ · تُوجَدُ</a:t>
@@ -35013,6 +35239,7 @@
                   <a:srgbClr val="1B3B6F"/>
                 </a:solidFill>
                 <a:latin typeface="Amiri" pitchFamily="2" charset="-78"/>
+                <a:ea typeface="Amiri" pitchFamily="2" charset="-78"/>
                 <a:cs typeface="Amiri" pitchFamily="2" charset="-78"/>
               </a:rPr>
               <a:t>تُوجَدُ حَدِيقَةٌ</a:t>
@@ -35116,6 +35343,7 @@
                   <a:srgbClr val="1B3B6F"/>
                 </a:solidFill>
                 <a:latin typeface="Amiri" pitchFamily="2" charset="-78"/>
+                <a:ea typeface="Amiri" pitchFamily="2" charset="-78"/>
                 <a:cs typeface="Amiri" pitchFamily="2" charset="-78"/>
               </a:rPr>
               <a:t>يُوجَدُ مَطْبَخٌ</a:t>
@@ -35381,6 +35609,7 @@
                   <a:srgbClr val="1B3B6F"/>
                 </a:solidFill>
                 <a:latin typeface="Amiri" pitchFamily="2" charset="-78"/>
+                <a:ea typeface="Amiri" pitchFamily="2" charset="-78"/>
                 <a:cs typeface="Amiri" pitchFamily="2" charset="-78"/>
               </a:rPr>
               <a:t>هٰذَا · هٰذِهِ</a:t>
@@ -35538,6 +35767,7 @@
                   <a:srgbClr val="1B3B6F"/>
                 </a:solidFill>
                 <a:latin typeface="Amiri" pitchFamily="2" charset="-78"/>
+                <a:ea typeface="Amiri" pitchFamily="2" charset="-78"/>
                 <a:cs typeface="Amiri" pitchFamily="2" charset="-78"/>
               </a:rPr>
               <a:t>هٰؤُلَاءِ</a:t>
@@ -35641,6 +35871,7 @@
                   <a:srgbClr val="1B3B6F"/>
                 </a:solidFill>
                 <a:latin typeface="Amiri" pitchFamily="2" charset="-78"/>
+                <a:ea typeface="Amiri" pitchFamily="2" charset="-78"/>
                 <a:cs typeface="Amiri" pitchFamily="2" charset="-78"/>
               </a:rPr>
               <a:t>هٰذِهِ</a:t>
@@ -35744,6 +35975,7 @@
                   <a:srgbClr val="1B3B6F"/>
                 </a:solidFill>
                 <a:latin typeface="Amiri" pitchFamily="2" charset="-78"/>
+                <a:ea typeface="Amiri" pitchFamily="2" charset="-78"/>
                 <a:cs typeface="Amiri" pitchFamily="2" charset="-78"/>
               </a:rPr>
               <a:t>هٰذَا</a:t>
@@ -36009,6 +36241,7 @@
                   <a:srgbClr val="1B3B6F"/>
                 </a:solidFill>
                 <a:latin typeface="Amiri" pitchFamily="2" charset="-78"/>
+                <a:ea typeface="Amiri" pitchFamily="2" charset="-78"/>
                 <a:cs typeface="Amiri" pitchFamily="2" charset="-78"/>
               </a:rPr>
               <a:t>الطَّابِقُ الأَرْضِيُّ</a:t>
@@ -36166,6 +36399,7 @@
                   <a:srgbClr val="1B3B6F"/>
                 </a:solidFill>
                 <a:latin typeface="Amiri" pitchFamily="2" charset="-78"/>
+                <a:ea typeface="Amiri" pitchFamily="2" charset="-78"/>
                 <a:cs typeface="Amiri" pitchFamily="2" charset="-78"/>
               </a:rPr>
               <a:t>الطَّابِقُ الثَّانِي</a:t>
@@ -36269,6 +36503,7 @@
                   <a:srgbClr val="1B3B6F"/>
                 </a:solidFill>
                 <a:latin typeface="Amiri" pitchFamily="2" charset="-78"/>
+                <a:ea typeface="Amiri" pitchFamily="2" charset="-78"/>
                 <a:cs typeface="Amiri" pitchFamily="2" charset="-78"/>
               </a:rPr>
               <a:t>الطَّابِقُ الأَوَّلُ</a:t>
@@ -36402,6 +36637,7 @@
                   <a:srgbClr val="D4AF37"/>
                 </a:solidFill>
                 <a:latin typeface="Amiri" pitchFamily="2" charset="-78"/>
+                <a:ea typeface="Amiri" pitchFamily="2" charset="-78"/>
                 <a:cs typeface="Amiri" pitchFamily="2" charset="-78"/>
               </a:rPr>
               <a:t>م</a:t>
@@ -36722,6 +36958,7 @@
                   <a:srgbClr val="8A6D1E"/>
                 </a:solidFill>
                 <a:latin typeface="Amiri" pitchFamily="2" charset="-78"/>
+                <a:ea typeface="Amiri" pitchFamily="2" charset="-78"/>
                 <a:cs typeface="Amiri" pitchFamily="2" charset="-78"/>
               </a:rPr>
               <a:t>أَيْنَ الأَشْيَاءُ؟</a:t>
@@ -37025,6 +37262,7 @@
                   <a:srgbClr val="1B3B6F"/>
                 </a:solidFill>
                 <a:latin typeface="Amiri" pitchFamily="2" charset="-78"/>
+                <a:ea typeface="Amiri" pitchFamily="2" charset="-78"/>
                 <a:cs typeface="Amiri" pitchFamily="2" charset="-78"/>
               </a:rPr>
               <a:t>فَوْقَ · تَحْتَ</a:t>
@@ -37344,6 +37582,7 @@
                   <a:srgbClr val="1B3B6F"/>
                 </a:solidFill>
                 <a:latin typeface="Amiri" pitchFamily="2" charset="-78"/>
+                <a:ea typeface="Amiri" pitchFamily="2" charset="-78"/>
                 <a:cs typeface="Amiri" pitchFamily="2" charset="-78"/>
               </a:rPr>
               <a:t>بِجَانِبِ · أَمَامَ · خَلْفَ</a:t>
@@ -37663,6 +37902,7 @@
                   <a:srgbClr val="1B3B6F"/>
                 </a:solidFill>
                 <a:latin typeface="Amiri" pitchFamily="2" charset="-78"/>
+                <a:ea typeface="Amiri" pitchFamily="2" charset="-78"/>
                 <a:cs typeface="Amiri" pitchFamily="2" charset="-78"/>
               </a:rPr>
               <a:t>وَاسِعٌ</a:t>
@@ -37820,6 +38060,7 @@
                   <a:srgbClr val="1B3B6F"/>
                 </a:solidFill>
                 <a:latin typeface="Amiri" pitchFamily="2" charset="-78"/>
+                <a:ea typeface="Amiri" pitchFamily="2" charset="-78"/>
                 <a:cs typeface="Amiri" pitchFamily="2" charset="-78"/>
               </a:rPr>
               <a:t>أَوْسَعُ</a:t>
@@ -37923,6 +38164,7 @@
                   <a:srgbClr val="1B3B6F"/>
                 </a:solidFill>
                 <a:latin typeface="Amiri" pitchFamily="2" charset="-78"/>
+                <a:ea typeface="Amiri" pitchFamily="2" charset="-78"/>
                 <a:cs typeface="Amiri" pitchFamily="2" charset="-78"/>
               </a:rPr>
               <a:t>وَاسِعَةٌ</a:t>
@@ -38026,6 +38268,7 @@
                   <a:srgbClr val="1B3B6F"/>
                 </a:solidFill>
                 <a:latin typeface="Amiri" pitchFamily="2" charset="-78"/>
+                <a:ea typeface="Amiri" pitchFamily="2" charset="-78"/>
                 <a:cs typeface="Amiri" pitchFamily="2" charset="-78"/>
               </a:rPr>
               <a:t>وَاسِعٌ</a:t>
@@ -38291,6 +38534,7 @@
                   <a:srgbClr val="1B3B6F"/>
                 </a:solidFill>
                 <a:latin typeface="Amiri" pitchFamily="2" charset="-78"/>
+                <a:ea typeface="Amiri" pitchFamily="2" charset="-78"/>
                 <a:cs typeface="Amiri" pitchFamily="2" charset="-78"/>
               </a:rPr>
               <a:t>مُرِيحٌ</a:t>
@@ -38448,6 +38692,7 @@
                   <a:srgbClr val="1B3B6F"/>
                 </a:solidFill>
                 <a:latin typeface="Amiri" pitchFamily="2" charset="-78"/>
+                <a:ea typeface="Amiri" pitchFamily="2" charset="-78"/>
                 <a:cs typeface="Amiri" pitchFamily="2" charset="-78"/>
               </a:rPr>
               <a:t>مُرِيحَةٌ</a:t>
@@ -38551,6 +38796,7 @@
                   <a:srgbClr val="1B3B6F"/>
                 </a:solidFill>
                 <a:latin typeface="Amiri" pitchFamily="2" charset="-78"/>
+                <a:ea typeface="Amiri" pitchFamily="2" charset="-78"/>
                 <a:cs typeface="Amiri" pitchFamily="2" charset="-78"/>
               </a:rPr>
               <a:t>مُرِيحَةٌ</a:t>
@@ -38654,6 +38900,7 @@
                   <a:srgbClr val="1B3B6F"/>
                 </a:solidFill>
                 <a:latin typeface="Amiri" pitchFamily="2" charset="-78"/>
+                <a:ea typeface="Amiri" pitchFamily="2" charset="-78"/>
                 <a:cs typeface="Amiri" pitchFamily="2" charset="-78"/>
               </a:rPr>
               <a:t>مُرِيحٌ</a:t>
@@ -38919,6 +39166,7 @@
                   <a:srgbClr val="1B3B6F"/>
                 </a:solidFill>
                 <a:latin typeface="Amiri" pitchFamily="2" charset="-78"/>
+                <a:ea typeface="Amiri" pitchFamily="2" charset="-78"/>
                 <a:cs typeface="Amiri" pitchFamily="2" charset="-78"/>
               </a:rPr>
               <a:t>حَدِيقَةٌ</a:t>
@@ -39076,6 +39324,7 @@
                   <a:srgbClr val="1B3B6F"/>
                 </a:solidFill>
                 <a:latin typeface="Amiri" pitchFamily="2" charset="-78"/>
+                <a:ea typeface="Amiri" pitchFamily="2" charset="-78"/>
                 <a:cs typeface="Amiri" pitchFamily="2" charset="-78"/>
               </a:rPr>
               <a:t>حَدَائِقُ</a:t>
@@ -39179,6 +39428,7 @@
                   <a:srgbClr val="1B3B6F"/>
                 </a:solidFill>
                 <a:latin typeface="Amiri" pitchFamily="2" charset="-78"/>
+                <a:ea typeface="Amiri" pitchFamily="2" charset="-78"/>
                 <a:cs typeface="Amiri" pitchFamily="2" charset="-78"/>
               </a:rPr>
               <a:t>حَدِيقَةٌ</a:t>
@@ -39444,6 +39694,7 @@
                   <a:srgbClr val="1B3B6F"/>
                 </a:solidFill>
                 <a:latin typeface="Amiri" pitchFamily="2" charset="-78"/>
+                <a:ea typeface="Amiri" pitchFamily="2" charset="-78"/>
                 <a:cs typeface="Amiri" pitchFamily="2" charset="-78"/>
               </a:rPr>
               <a:t>هَادِئٌ · مُزْدَحِمٌ</a:t>
@@ -39601,6 +39852,7 @@
                   <a:srgbClr val="1B3B6F"/>
                 </a:solidFill>
                 <a:latin typeface="Amiri" pitchFamily="2" charset="-78"/>
+                <a:ea typeface="Amiri" pitchFamily="2" charset="-78"/>
                 <a:cs typeface="Amiri" pitchFamily="2" charset="-78"/>
               </a:rPr>
               <a:t>هَادِئَةٌ · مُزْدَحِمَةٌ</a:t>
@@ -39734,6 +39986,7 @@
                   <a:srgbClr val="D4AF37"/>
                 </a:solidFill>
                 <a:latin typeface="Amiri" pitchFamily="2" charset="-78"/>
+                <a:ea typeface="Amiri" pitchFamily="2" charset="-78"/>
                 <a:cs typeface="Amiri" pitchFamily="2" charset="-78"/>
               </a:rPr>
               <a:t>م</a:t>
@@ -40054,6 +40307,7 @@
                   <a:srgbClr val="8A6D1E"/>
                 </a:solidFill>
                 <a:latin typeface="Amiri" pitchFamily="2" charset="-78"/>
+                <a:ea typeface="Amiri" pitchFamily="2" charset="-78"/>
                 <a:cs typeface="Amiri" pitchFamily="2" charset="-78"/>
               </a:rPr>
               <a:t>فِي الغُرَفِ</a:t>
@@ -41230,6 +41484,7 @@
                   <a:srgbClr val="1B3B6F"/>
                 </a:solidFill>
                 <a:latin typeface="Amiri" pitchFamily="2" charset="-78"/>
+                <a:ea typeface="Amiri" pitchFamily="2" charset="-78"/>
                 <a:cs typeface="Amiri" pitchFamily="2" charset="-78"/>
               </a:rPr>
               <a:t>دَوْرُكَ!</a:t>
@@ -41306,6 +41561,7 @@
                   <a:srgbClr val="1B3B6F"/>
                 </a:solidFill>
                 <a:latin typeface="Amiri" pitchFamily="2" charset="-78"/>
+                <a:ea typeface="Amiri" pitchFamily="2" charset="-78"/>
                 <a:cs typeface="Amiri" pitchFamily="2" charset="-78"/>
               </a:rPr>
               <a:t>أَحْسَنْتَ! / أَحْسَنْتِ!</a:t>
@@ -41382,6 +41638,7 @@
                   <a:srgbClr val="1B3B6F"/>
                 </a:solidFill>
                 <a:latin typeface="Amiri" pitchFamily="2" charset="-78"/>
+                <a:ea typeface="Amiri" pitchFamily="2" charset="-78"/>
                 <a:cs typeface="Amiri" pitchFamily="2" charset="-78"/>
               </a:rPr>
               <a:t>تَكَلَّمْ أَكْثَرَ، مِنْ فَضْلِكَ</a:t>
@@ -41458,6 +41715,7 @@
                   <a:srgbClr val="1B3B6F"/>
                 </a:solidFill>
                 <a:latin typeface="Amiri" pitchFamily="2" charset="-78"/>
+                <a:ea typeface="Amiri" pitchFamily="2" charset="-78"/>
                 <a:cs typeface="Amiri" pitchFamily="2" charset="-78"/>
               </a:rPr>
               <a:t>لِمَاذَا؟</a:t>
@@ -41629,6 +41887,7 @@
                   <a:srgbClr val="D4AF37"/>
                 </a:solidFill>
                 <a:latin typeface="Amiri" pitchFamily="2" charset="-78"/>
+                <a:ea typeface="Amiri" pitchFamily="2" charset="-78"/>
                 <a:cs typeface="Amiri" pitchFamily="2" charset="-78"/>
               </a:rPr>
               <a:t>م</a:t>
@@ -41949,6 +42208,7 @@
                   <a:srgbClr val="8A6D1E"/>
                 </a:solidFill>
                 <a:latin typeface="Amiri" pitchFamily="2" charset="-78"/>
+                <a:ea typeface="Amiri" pitchFamily="2" charset="-78"/>
                 <a:cs typeface="Amiri" pitchFamily="2" charset="-78"/>
               </a:rPr>
               <a:t>شَقَّتُنَا الجَدِيدَةُ</a:t>
@@ -42229,6 +42489,7 @@
                   <a:srgbClr val="1B3B6F"/>
                 </a:solidFill>
                 <a:latin typeface="Amiri" pitchFamily="2" charset="-78"/>
+                <a:ea typeface="Amiri" pitchFamily="2" charset="-78"/>
                 <a:cs typeface="Amiri" pitchFamily="2" charset="-78"/>
               </a:rPr>
               <a:t>فِيهَا … غُرَفٍ</a:t>
@@ -42305,6 +42566,7 @@
                   <a:srgbClr val="1B3B6F"/>
                 </a:solidFill>
                 <a:latin typeface="Amiri" pitchFamily="2" charset="-78"/>
+                <a:ea typeface="Amiri" pitchFamily="2" charset="-78"/>
                 <a:cs typeface="Amiri" pitchFamily="2" charset="-78"/>
               </a:rPr>
               <a:t>شَقَّةٌ جَمِيلَةٌ! كَمْ غُرْفَةً فِيهَا؟</a:t>
@@ -42473,6 +42735,7 @@
                   <a:srgbClr val="1B3B6F"/>
                 </a:solidFill>
                 <a:latin typeface="Amiri" pitchFamily="2" charset="-78"/>
+                <a:ea typeface="Amiri" pitchFamily="2" charset="-78"/>
                 <a:cs typeface="Amiri" pitchFamily="2" charset="-78"/>
               </a:rPr>
               <a:t>نَحْنُ فِي الطَّابِقِ …</a:t>
@@ -42549,6 +42812,7 @@
                   <a:srgbClr val="1B3B6F"/>
                 </a:solidFill>
                 <a:latin typeface="Amiri" pitchFamily="2" charset="-78"/>
+                <a:ea typeface="Amiri" pitchFamily="2" charset="-78"/>
                 <a:cs typeface="Amiri" pitchFamily="2" charset="-78"/>
               </a:rPr>
               <a:t>فِي أَيِّ طَابِقٍ أَنْتُمْ؟</a:t>
@@ -42717,6 +42981,7 @@
                   <a:srgbClr val="1B3B6F"/>
                 </a:solidFill>
                 <a:latin typeface="Amiri" pitchFamily="2" charset="-78"/>
+                <a:ea typeface="Amiri" pitchFamily="2" charset="-78"/>
                 <a:cs typeface="Amiri" pitchFamily="2" charset="-78"/>
               </a:rPr>
               <a:t>غُرْفَتِي بِجَانِبِ …</a:t>
@@ -42793,6 +43058,7 @@
                   <a:srgbClr val="1B3B6F"/>
                 </a:solidFill>
                 <a:latin typeface="Amiri" pitchFamily="2" charset="-78"/>
+                <a:ea typeface="Amiri" pitchFamily="2" charset="-78"/>
                 <a:cs typeface="Amiri" pitchFamily="2" charset="-78"/>
               </a:rPr>
               <a:t>أَيْنَ غُرْفَتُكَ؟</a:t>
@@ -42961,6 +43227,7 @@
                   <a:srgbClr val="1B3B6F"/>
                 </a:solidFill>
                 <a:latin typeface="Amiri" pitchFamily="2" charset="-78"/>
+                <a:ea typeface="Amiri" pitchFamily="2" charset="-78"/>
                 <a:cs typeface="Amiri" pitchFamily="2" charset="-78"/>
               </a:rPr>
               <a:t>يُوجَدُ … وَتُوجَدُ …</a:t>
@@ -43037,6 +43304,7 @@
                   <a:srgbClr val="1B3B6F"/>
                 </a:solidFill>
                 <a:latin typeface="Amiri" pitchFamily="2" charset="-78"/>
+                <a:ea typeface="Amiri" pitchFamily="2" charset="-78"/>
                 <a:cs typeface="Amiri" pitchFamily="2" charset="-78"/>
               </a:rPr>
               <a:t>مَاذَا يُوجَدُ فِي غُرْفَتِكَ؟</a:t>
@@ -43205,6 +43473,7 @@
                   <a:srgbClr val="1B3B6F"/>
                 </a:solidFill>
                 <a:latin typeface="Amiri" pitchFamily="2" charset="-78"/>
+                <a:ea typeface="Amiri" pitchFamily="2" charset="-78"/>
                 <a:cs typeface="Amiri" pitchFamily="2" charset="-78"/>
               </a:rPr>
               <a:t>نَعَمْ، لِأَنَّهَا … لٰكِنْ …</a:t>
@@ -43281,6 +43550,7 @@
                   <a:srgbClr val="1B3B6F"/>
                 </a:solidFill>
                 <a:latin typeface="Amiri" pitchFamily="2" charset="-78"/>
+                <a:ea typeface="Amiri" pitchFamily="2" charset="-78"/>
                 <a:cs typeface="Amiri" pitchFamily="2" charset="-78"/>
               </a:rPr>
               <a:t>هَلْ تُحِبُّ هٰذِهِ الشَّقَّةَ؟</a:t>
@@ -43555,6 +43825,7 @@
                   <a:srgbClr val="D4AF37"/>
                 </a:solidFill>
                 <a:latin typeface="Amiri" pitchFamily="2" charset="-78"/>
+                <a:ea typeface="Amiri" pitchFamily="2" charset="-78"/>
                 <a:cs typeface="Amiri" pitchFamily="2" charset="-78"/>
               </a:rPr>
               <a:t>م</a:t>
@@ -43875,6 +44146,7 @@
                   <a:srgbClr val="8A6D1E"/>
                 </a:solidFill>
                 <a:latin typeface="Amiri" pitchFamily="2" charset="-78"/>
+                <a:ea typeface="Amiri" pitchFamily="2" charset="-78"/>
                 <a:cs typeface="Amiri" pitchFamily="2" charset="-78"/>
               </a:rPr>
               <a:t>فِي مَكْتَبِ العَقَارَاتِ</a:t>
@@ -44155,6 +44427,7 @@
                   <a:srgbClr val="1B3B6F"/>
                 </a:solidFill>
                 <a:latin typeface="Amiri" pitchFamily="2" charset="-78"/>
+                <a:ea typeface="Amiri" pitchFamily="2" charset="-78"/>
                 <a:cs typeface="Amiri" pitchFamily="2" charset="-78"/>
               </a:rPr>
               <a:t>أَبْحَثُ عَنْ … فِيهِ / فِيهَا …</a:t>
@@ -44231,6 +44504,7 @@
                   <a:srgbClr val="1B3B6F"/>
                 </a:solidFill>
                 <a:latin typeface="Amiri" pitchFamily="2" charset="-78"/>
+                <a:ea typeface="Amiri" pitchFamily="2" charset="-78"/>
                 <a:cs typeface="Amiri" pitchFamily="2" charset="-78"/>
               </a:rPr>
               <a:t>أَهْلًا، مَاذَا تَبْحَثُ عَنْهُ؟</a:t>
@@ -44399,6 +44673,7 @@
                   <a:srgbClr val="1B3B6F"/>
                 </a:solidFill>
                 <a:latin typeface="Amiri" pitchFamily="2" charset="-78"/>
+                <a:ea typeface="Amiri" pitchFamily="2" charset="-78"/>
                 <a:cs typeface="Amiri" pitchFamily="2" charset="-78"/>
               </a:rPr>
               <a:t>قَرِيبٌ مِنْ … لِأَنَّ …</a:t>
@@ -44475,6 +44750,7 @@
                   <a:srgbClr val="1B3B6F"/>
                 </a:solidFill>
                 <a:latin typeface="Amiri" pitchFamily="2" charset="-78"/>
+                <a:ea typeface="Amiri" pitchFamily="2" charset="-78"/>
                 <a:cs typeface="Amiri" pitchFamily="2" charset="-78"/>
               </a:rPr>
               <a:t>فِي أَيِّ مِنْطَقَةٍ؟</a:t>
@@ -44643,6 +44919,7 @@
                   <a:srgbClr val="1B3B6F"/>
                 </a:solidFill>
                 <a:latin typeface="Amiri" pitchFamily="2" charset="-78"/>
+                <a:ea typeface="Amiri" pitchFamily="2" charset="-78"/>
                 <a:cs typeface="Amiri" pitchFamily="2" charset="-78"/>
               </a:rPr>
               <a:t>هَلْ يُوجَدُ …؟ كَمْ …؟</a:t>
@@ -44719,6 +44996,7 @@
                   <a:srgbClr val="1B3B6F"/>
                 </a:solidFill>
                 <a:latin typeface="Amiri" pitchFamily="2" charset="-78"/>
+                <a:ea typeface="Amiri" pitchFamily="2" charset="-78"/>
                 <a:cs typeface="Amiri" pitchFamily="2" charset="-78"/>
               </a:rPr>
               <a:t>عِنْدَنَا هٰذَا البَيْتُ فِي شَارِعِ الوَرْدِ.</a:t>
@@ -44822,6 +45100,7 @@
                   <a:srgbClr val="1B3B6F"/>
                 </a:solidFill>
                 <a:latin typeface="Amiri" pitchFamily="2" charset="-78"/>
+                <a:ea typeface="Amiri" pitchFamily="2" charset="-78"/>
                 <a:cs typeface="Amiri" pitchFamily="2" charset="-78"/>
               </a:rPr>
               <a:t>هٰذَا أَغْلَى مِنْ … لٰكِنَّهُ …</a:t>
@@ -44898,6 +45177,7 @@
                   <a:srgbClr val="1B3B6F"/>
                 </a:solidFill>
                 <a:latin typeface="Amiri" pitchFamily="2" charset="-78"/>
+                <a:ea typeface="Amiri" pitchFamily="2" charset="-78"/>
                 <a:cs typeface="Amiri" pitchFamily="2" charset="-78"/>
               </a:rPr>
               <a:t>يُوجَدُ مَوْقِفٌ، وَالإِيجَارُ أَلْفُ دِينَارٍ.</a:t>
@@ -45001,6 +45281,7 @@
                   <a:srgbClr val="1B3B6F"/>
                 </a:solidFill>
                 <a:latin typeface="Amiri" pitchFamily="2" charset="-78"/>
+                <a:ea typeface="Amiri" pitchFamily="2" charset="-78"/>
                 <a:cs typeface="Amiri" pitchFamily="2" charset="-78"/>
               </a:rPr>
               <a:t>يَوْمَ … فِي السَّاعَةِ …</a:t>
@@ -45077,6 +45358,7 @@
                   <a:srgbClr val="1B3B6F"/>
                 </a:solidFill>
                 <a:latin typeface="Amiri" pitchFamily="2" charset="-78"/>
+                <a:ea typeface="Amiri" pitchFamily="2" charset="-78"/>
                 <a:cs typeface="Amiri" pitchFamily="2" charset="-78"/>
               </a:rPr>
               <a:t>مَتَى تُرِيدُ أَنْ تَزُورَهُ؟</a:t>
@@ -45251,13 +45533,9 @@
     <a:fontScheme name="Office">
       <a:majorFont>
         <a:latin typeface="Calibri Light" panose="020F0302020204030204"/>
-        <a:ea typeface=""/>
-        <a:cs typeface=""/>
-        <a:font script="Jpan" typeface="游ゴシック Light"/>
-        <a:font script="Hang" typeface="맑은 고딕"/>
-        <a:font script="Hans" typeface="等线 Light"/>
-        <a:font script="Hant" typeface="新細明體"/>
-        <a:font script="Arab" typeface="Times New Roman"/>
+        <a:ea typeface="Amiri" pitchFamily="2" charset="-78"/>
+        <a:cs typeface="Amiri" pitchFamily="2" charset="-78"/>
+        <a:font script="Arab" typeface="Amiri"/>
         <a:font script="Hebr" typeface="Times New Roman"/>
         <a:font script="Thai" typeface="Angsana New"/>
         <a:font script="Ethi" typeface="Nyala"/>
@@ -45303,13 +45581,9 @@
       </a:majorFont>
       <a:minorFont>
         <a:latin typeface="Calibri" panose="020F0502020204030204"/>
-        <a:ea typeface=""/>
-        <a:cs typeface=""/>
-        <a:font script="Jpan" typeface="游ゴシック"/>
-        <a:font script="Hang" typeface="맑은 고딕"/>
-        <a:font script="Hans" typeface="等线"/>
-        <a:font script="Hant" typeface="新細明體"/>
-        <a:font script="Arab" typeface="Arial"/>
+        <a:ea typeface="Amiri" pitchFamily="2" charset="-78"/>
+        <a:cs typeface="Amiri" pitchFamily="2" charset="-78"/>
+        <a:font script="Arab" typeface="Amiri"/>
         <a:font script="Hebr" typeface="Arial"/>
         <a:font script="Thai" typeface="Cordia New"/>
         <a:font script="Ethi" typeface="Nyala"/>
